--- a/lecons/F3/35_FORM4_LESSON31_Weather_and_Climate.pptx
+++ b/lecons/F3/35_FORM4_LESSON31_Weather_and_Climate.pptx
@@ -50,9 +50,13 @@
     <p:sldId id="298" r:id="rId44"/>
     <p:sldId id="299" r:id="rId45"/>
     <p:sldId id="300" r:id="rId46"/>
+    <p:sldId id="301" r:id="rId47"/>
+    <p:sldId id="302" r:id="rId48"/>
+    <p:sldId id="303" r:id="rId49"/>
+    <p:sldId id="304" r:id="rId50"/>
   </p:sldIdLst>
   <p:notesMasterIdLst>
-    <p:notesMasterId r:id="rId47"/>
+    <p:notesMasterId r:id="rId51"/>
   </p:notesMasterIdLst>
   <p:sldSz cx="12192000" cy="6858000"/>
   <p:notesSz cx="6858000" cy="12192000"/>
@@ -634,7 +638,7 @@
           <a:p>
             <a:r>
               <a:rPr lang="en-US" dirty="0"/>
-              <a:t>Listen carefully to this situation from real life. On Monday morning, it rains in Garoua, so Idrissa takes an umbrella. His cousin in Paris says: "But Garoua has a hot climate. Why do you need an umbrella?" Think about it, because I am going to ask you some questions.</a:t>
+              <a:t>Listen carefully to this situation from real life. On Monday morning it rains in Garoua, so Idrissa takes an umbrella. His cousin in Paris laughs: "But Garoua has a hot climate. Why do you need an umbrella?" Idrissa asks his teacher: "What is the difference between the weather and the climate, and how do we measure them?" Think about it, because I am going to ask you some questions.</a:t>
             </a:r>
             <a:endParaRPr lang="en-US" dirty="0"/>
           </a:p>
@@ -810,7 +814,7 @@
           <a:p>
             <a:r>
               <a:rPr lang="en-US" dirty="0"/>
-              <a:t>Good. The cousin mixes up weather and climate.</a:t>
+              <a:t>Good. The cousin confuses weather and climate, and Idrissa does not know how they are measured.</a:t>
             </a:r>
             <a:endParaRPr lang="en-US" dirty="0"/>
           </a:p>
@@ -986,7 +990,7 @@
           <a:p>
             <a:r>
               <a:rPr lang="en-US" dirty="0"/>
-              <a:t>Good. Cloudy and rainy.</a:t>
+              <a:t>Good. It is rainy.</a:t>
             </a:r>
             <a:endParaRPr lang="en-US" dirty="0"/>
           </a:p>
@@ -1162,7 +1166,7 @@
           <a:p>
             <a:r>
               <a:rPr lang="en-US" dirty="0"/>
-              <a:t>Good. Hot, with a wet and a dry season.</a:t>
+              <a:t>Good. It is hot, with a wet season and a dry season (tropical).</a:t>
             </a:r>
             <a:endParaRPr lang="en-US" dirty="0"/>
           </a:p>
@@ -1426,7 +1430,7 @@
           <a:p>
             <a:r>
               <a:rPr lang="en-US" dirty="0"/>
-              <a:t>Activity 1. Look carefully at this picture: a rainy afternoon. Observe every detail before I ask the question.</a:t>
+              <a:t>Activity 1. Look carefully at this picture: a rainy day. Observe every detail before I ask the question.</a:t>
             </a:r>
             <a:endParaRPr lang="en-US" dirty="0"/>
           </a:p>
@@ -1602,7 +1606,7 @@
           <a:p>
             <a:r>
               <a:rPr lang="en-US" dirty="0"/>
-              <a:t>Here is the question for Activity 1: The condition of the air today is rainy. Is this the weather or the climate? Take one minute to think and write your answer in your rough notebook.</a:t>
+              <a:t>Here is the question for Activity 1: The air is rainy today. Is this the weather or the climate? Take one minute to think and write your answer in your rough notebook.</a:t>
             </a:r>
             <a:endParaRPr lang="en-US" dirty="0"/>
           </a:p>
@@ -1954,7 +1958,7 @@
           <a:p>
             <a:r>
               <a:rPr lang="en-US" dirty="0"/>
-              <a:t>Let us check the answer together. They measure the weather every day.</a:t>
+              <a:t>Let us check the answer together. They measure and record the weather every day.</a:t>
             </a:r>
             <a:endParaRPr lang="en-US" dirty="0"/>
           </a:p>
@@ -2042,7 +2046,7 @@
           <a:p>
             <a:r>
               <a:rPr lang="en-US" dirty="0"/>
-              <a:t>Activity 3. Look carefully at this picture: instruments that measure the wind. Observe every detail before I ask the question.</a:t>
+              <a:t>Activity 3. Look carefully at this picture: an instrument with cups on a mast. Observe every detail before I ask the question.</a:t>
             </a:r>
             <a:endParaRPr lang="en-US" dirty="0"/>
           </a:p>
@@ -2130,7 +2134,7 @@
           <a:p>
             <a:r>
               <a:rPr lang="en-US" dirty="0"/>
-              <a:t>Here is the question for Activity 3: Which instrument measures wind speed? Which one shows wind direction? Take one minute to think and write your answer in your rough notebook.</a:t>
+              <a:t>Here is the question for Activity 3: This instrument turns faster when the wind is strong. What does it measure? Take one minute to think and write your answer in your rough notebook.</a:t>
             </a:r>
             <a:endParaRPr lang="en-US" dirty="0"/>
           </a:p>
@@ -2218,7 +2222,7 @@
           <a:p>
             <a:r>
               <a:rPr lang="en-US" dirty="0"/>
-              <a:t>Let us check the answer together. The anemometer (speed); the wind vane (direction).</a:t>
+              <a:t>Let us check the answer together. Wind speed: it is an anemometer.</a:t>
             </a:r>
             <a:endParaRPr lang="en-US" dirty="0"/>
           </a:p>
@@ -2394,7 +2398,7 @@
           <a:p>
             <a:r>
               <a:rPr lang="en-US" dirty="0"/>
-              <a:t>Let us copy Weather and Climate. Weather and climate are defined as follows. On this slide we have Weather and Climate. Write each point on a new line, with the key term first, and explain it in your own words when we revise.</a:t>
+              <a:t>Let us copy the definitions. The key terms of this lesson are defined as follows. On this slide we have Weather and Climate. Write each point on a new line, with the key term first, and explain it in your own words when we revise. When you finish, we go to the next slide.</a:t>
             </a:r>
             <a:endParaRPr lang="en-US" dirty="0"/>
           </a:p>
@@ -2570,7 +2574,7 @@
           <a:p>
             <a:r>
               <a:rPr lang="en-US" dirty="0"/>
-              <a:t>Let us copy The Weather Station. The weather station is defined as follows. On this slide we have Weather station. Write each point on a new line, with the key term first, and explain it in your own words when we revise.</a:t>
+              <a:t>We continue with the definitions. On this slide we have Weather station and Isoline. Write each point on a new line, with the key term first, and explain it in your own words when we revise.</a:t>
             </a:r>
             <a:endParaRPr lang="en-US" dirty="0"/>
           </a:p>
@@ -2658,7 +2662,7 @@
           <a:p>
             <a:r>
               <a:rPr lang="en-US" dirty="0"/>
-              <a:t>Let us copy Weather Elements, Instruments and Isolines. Weather elements are measured and shown as follows. On this slide we have Temperature and Rainfall. Write each point on a new line, with the key term first, and explain it in your own words when we revise. When you finish, we go to the next slide.</a:t>
+              <a:t>Let us copy Weather Elements, Instruments and Measurements. The weather elements are measured as follows. Copy the point on Temperature on the left, then draw the diagram on the right: weather instruments. Give it a title and label it clearly.</a:t>
             </a:r>
             <a:endParaRPr lang="en-US" dirty="0"/>
           </a:p>
@@ -2746,7 +2750,7 @@
           <a:p>
             <a:r>
               <a:rPr lang="en-US" dirty="0"/>
-              <a:t>We continue with Weather Elements, Instruments and Isolines. On this slide we have Wind and Air pressure. Write each point on a new line, with the key term first, and explain it in your own words when we revise.</a:t>
+              <a:t>Copy the point on Rainfall on the left, then draw the diagram on the right: a rain gauge. Give it a title and label it clearly.</a:t>
             </a:r>
             <a:endParaRPr lang="en-US" dirty="0"/>
           </a:p>
@@ -2834,7 +2838,7 @@
           <a:p>
             <a:r>
               <a:rPr lang="en-US" dirty="0"/>
-              <a:t>Now draw this illustration in your notebook: weather instruments. Give it a title and label it clearly.</a:t>
+              <a:t>We continue with Weather Elements, Instruments and Measurements. On this slide we have Humidity and Air pressure. Write each point on a new line, with the key term first, and explain it in your own words when we revise.</a:t>
             </a:r>
             <a:endParaRPr lang="en-US" dirty="0"/>
           </a:p>
@@ -2922,7 +2926,7 @@
           <a:p>
             <a:r>
               <a:rPr lang="en-US" dirty="0"/>
-              <a:t>Now let us check what you have understood. Question 1: What is the difference between weather and climate? Answer in your exercise book.</a:t>
+              <a:t>Copy the point on Wind on the left, then draw the diagram on the right: an anemometer. Give it a title and label it clearly.</a:t>
             </a:r>
             <a:endParaRPr lang="en-US" dirty="0"/>
           </a:p>
@@ -3010,7 +3014,7 @@
           <a:p>
             <a:r>
               <a:rPr lang="en-US" dirty="0"/>
-              <a:t>The expected answer is: weather is today; climate is the average over about 30 years. If you got it right, well done.</a:t>
+              <a:t>We continue with Weather Elements, Instruments and Measurements. On this slide we have Sunshine. Write each point on a new line, with the key term first, and explain it in your own words when we revise.</a:t>
             </a:r>
             <a:endParaRPr lang="en-US" dirty="0"/>
           </a:p>
@@ -3098,7 +3102,7 @@
           <a:p>
             <a:r>
               <a:rPr lang="en-US" dirty="0"/>
-              <a:t>Now let us check what you have understood. Question 2: Which instrument measures rainfall? Answer in your exercise book.</a:t>
+              <a:t>Let us copy Isolines of the Weather Elements. Weather elements are shown on maps by the following isolines. On this slide we have Isotherms and Isohyets. Write each point on a new line, with the key term first, and explain it in your own words when we revise. When you finish, we go to the next slide.</a:t>
             </a:r>
             <a:endParaRPr lang="en-US" dirty="0"/>
           </a:p>
@@ -3186,7 +3190,7 @@
           <a:p>
             <a:r>
               <a:rPr lang="en-US" dirty="0"/>
-              <a:t>The expected answer is: the rain gauge. If you got it right, well done.</a:t>
+              <a:t>We continue with Isolines of the Weather Elements. On this slide we have Isobars and Isohels. Write each point on a new line, with the key term first, and explain it in your own words when we revise.</a:t>
             </a:r>
             <a:endParaRPr lang="en-US" dirty="0"/>
           </a:p>
@@ -3274,7 +3278,7 @@
           <a:p>
             <a:r>
               <a:rPr lang="en-US" dirty="0"/>
-              <a:t>For those who need more practice, fill in the blanks in your exercise book. The answers are: number 1, weather; number 2, climate; number 3, anemometer.</a:t>
+              <a:t>Now let us check what you have understood. Question 1: What is the difference between weather and climate? Answer in your exercise book.</a:t>
             </a:r>
             <a:endParaRPr lang="en-US" dirty="0"/>
           </a:p>
@@ -3362,7 +3366,7 @@
           <a:p>
             <a:r>
               <a:rPr lang="en-US" dirty="0"/>
-              <a:t>For your homework: Put one bottle of water in the sun and another in the shade for one hour. Touch both and write down which is hotter and why. We shall correct it at the beginning of our next lesson.</a:t>
+              <a:t>The expected answer is: weather is today; climate is the average over about 30 years. If you got it right, well done.</a:t>
             </a:r>
             <a:endParaRPr lang="en-US" dirty="0"/>
           </a:p>
@@ -3538,7 +3542,7 @@
           <a:p>
             <a:r>
               <a:rPr lang="en-US" dirty="0"/>
-              <a:t>Our next lesson will be on Lesson 32: Weather Elements: Atmospheric Temperatures. Thank you for your attention, and see you next time.</a:t>
+              <a:t>Now let us check what you have understood. Question 2: Which instrument measures rainfall? Answer in your exercise book.</a:t>
             </a:r>
             <a:endParaRPr lang="en-US" dirty="0"/>
           </a:p>
@@ -3626,7 +3630,7 @@
           <a:p>
             <a:r>
               <a:rPr lang="en-US" dirty="0"/>
-              <a:t>Let us play the bilingual game. I say a word in English, and you give me the French word. Then we do the reverse.</a:t>
+              <a:t>The expected answer is: the rain gauge. If you got it right, well done.</a:t>
             </a:r>
             <a:endParaRPr lang="en-US" dirty="0"/>
           </a:p>
@@ -3714,7 +3718,7 @@
           <a:p>
             <a:r>
               <a:rPr lang="en-US" dirty="0"/>
-              <a:t>I record this information in the official logbook of the class after the lesson.</a:t>
+              <a:t>For those who need more practice, fill in the blanks in your exercise book. The answers are: number 1, weather; number 2, climate; number 3, anemometer.</a:t>
             </a:r>
             <a:endParaRPr lang="en-US" dirty="0"/>
           </a:p>
@@ -3802,7 +3806,7 @@
           <a:p>
             <a:r>
               <a:rPr lang="en-US" dirty="0"/>
-              <a:t>I complete the second page of the logbook: the matter taught, the evaluation, the homework and the attendance.</a:t>
+              <a:t>For your homework: Put one bottle of water in the sun and another in the shade for one hour. Touch both and write down which is hotter and why. We shall correct it at the beginning of our next lesson.</a:t>
             </a:r>
             <a:endParaRPr lang="en-US" dirty="0"/>
           </a:p>
@@ -3890,7 +3894,7 @@
           <a:p>
             <a:r>
               <a:rPr lang="en-US" dirty="0"/>
-              <a:t>This slide is for me, the teacher: it gives the timing of the lesson and what to do if the projector is not available.</a:t>
+              <a:t>Our next lesson will be on Lesson 32: Weather Elements: Atmospheric Temperatures. Thank you for your attention, and see you next time.</a:t>
             </a:r>
             <a:endParaRPr lang="en-US" dirty="0"/>
           </a:p>
@@ -3978,7 +3982,7 @@
           <a:p>
             <a:r>
               <a:rPr lang="en-US" dirty="0"/>
-              <a:t>These are the references and picture credits used to prepare this lesson.</a:t>
+              <a:t>Let us play the bilingual game. I say a word in English, and you give me the French word. Then we do the reverse.</a:t>
             </a:r>
             <a:endParaRPr lang="en-US" dirty="0"/>
           </a:p>
@@ -4002,6 +4006,358 @@
             <a:fld id="{F7021451-1387-4CA6-816F-3879F97B5CBC}" type="slidenum">
               <a:rPr lang="en-US"/>
               <a:t>45</a:t>
+            </a:fld>
+            <a:endParaRPr lang="en-US"/>
+          </a:p>
+        </p:txBody>
+      </p:sp>
+    </p:spTree>
+    <p:extLst>
+      <p:ext uri="{BB962C8B-B14F-4D97-AF65-F5344CB8AC3E}">
+        <p14:creationId xmlns:p14="http://schemas.microsoft.com/office/powerpoint/2010/main" val="1024086991"/>
+      </p:ext>
+    </p:extLst>
+  </p:cSld>
+  <p:clrMapOvr>
+    <a:masterClrMapping/>
+  </p:clrMapOvr>
+</p:notes>
+</file>
+
+<file path=ppt/notesSlides/notesSlide46.xml><?xml version="1.0" encoding="utf-8"?>
+<p:notes xmlns:a="http://schemas.openxmlformats.org/drawingml/2006/main" xmlns:r="http://schemas.openxmlformats.org/officeDocument/2006/relationships" xmlns:p="http://schemas.openxmlformats.org/presentationml/2006/main">
+  <p:cSld>
+    <p:spTree>
+      <p:nvGrpSpPr>
+        <p:cNvPr id="1" name=""/>
+        <p:cNvGrpSpPr/>
+        <p:nvPr/>
+      </p:nvGrpSpPr>
+      <p:grpSpPr>
+        <a:xfrm>
+          <a:off x="0" y="0"/>
+          <a:ext cx="0" cy="0"/>
+          <a:chOff x="0" y="0"/>
+          <a:chExt cx="0" cy="0"/>
+        </a:xfrm>
+      </p:grpSpPr>
+      <p:sp>
+        <p:nvSpPr>
+          <p:cNvPr id="2" name="Slide Image Placeholder 1"/>
+          <p:cNvSpPr>
+            <a:spLocks noGrp="1" noRot="1" noChangeAspect="1"/>
+          </p:cNvSpPr>
+          <p:nvPr>
+            <p:ph type="sldImg"/>
+          </p:nvPr>
+        </p:nvSpPr>
+        <p:spPr/>
+      </p:sp>
+      <p:sp>
+        <p:nvSpPr>
+          <p:cNvPr id="3" name="Notes Placeholder 2"/>
+          <p:cNvSpPr>
+            <a:spLocks noGrp="1"/>
+          </p:cNvSpPr>
+          <p:nvPr>
+            <p:ph type="body" idx="1"/>
+          </p:nvPr>
+        </p:nvSpPr>
+        <p:spPr/>
+        <p:txBody>
+          <a:bodyPr/>
+          <a:lstStyle/>
+          <a:p>
+            <a:r>
+              <a:rPr lang="en-US" dirty="0"/>
+              <a:t>I record this information in the official logbook of the class after the lesson.</a:t>
+            </a:r>
+            <a:endParaRPr lang="en-US" dirty="0"/>
+          </a:p>
+        </p:txBody>
+      </p:sp>
+      <p:sp>
+        <p:nvSpPr>
+          <p:cNvPr id="4" name="Slide Number Placeholder 3"/>
+          <p:cNvSpPr>
+            <a:spLocks noGrp="1"/>
+          </p:cNvSpPr>
+          <p:nvPr>
+            <p:ph type="sldNum" sz="quarter" idx="10"/>
+          </p:nvPr>
+        </p:nvSpPr>
+        <p:spPr/>
+        <p:txBody>
+          <a:bodyPr/>
+          <a:lstStyle/>
+          <a:p>
+            <a:fld id="{F7021451-1387-4CA6-816F-3879F97B5CBC}" type="slidenum">
+              <a:rPr lang="en-US"/>
+              <a:t>46</a:t>
+            </a:fld>
+            <a:endParaRPr lang="en-US"/>
+          </a:p>
+        </p:txBody>
+      </p:sp>
+    </p:spTree>
+    <p:extLst>
+      <p:ext uri="{BB962C8B-B14F-4D97-AF65-F5344CB8AC3E}">
+        <p14:creationId xmlns:p14="http://schemas.microsoft.com/office/powerpoint/2010/main" val="1024086991"/>
+      </p:ext>
+    </p:extLst>
+  </p:cSld>
+  <p:clrMapOvr>
+    <a:masterClrMapping/>
+  </p:clrMapOvr>
+</p:notes>
+</file>
+
+<file path=ppt/notesSlides/notesSlide47.xml><?xml version="1.0" encoding="utf-8"?>
+<p:notes xmlns:a="http://schemas.openxmlformats.org/drawingml/2006/main" xmlns:r="http://schemas.openxmlformats.org/officeDocument/2006/relationships" xmlns:p="http://schemas.openxmlformats.org/presentationml/2006/main">
+  <p:cSld>
+    <p:spTree>
+      <p:nvGrpSpPr>
+        <p:cNvPr id="1" name=""/>
+        <p:cNvGrpSpPr/>
+        <p:nvPr/>
+      </p:nvGrpSpPr>
+      <p:grpSpPr>
+        <a:xfrm>
+          <a:off x="0" y="0"/>
+          <a:ext cx="0" cy="0"/>
+          <a:chOff x="0" y="0"/>
+          <a:chExt cx="0" cy="0"/>
+        </a:xfrm>
+      </p:grpSpPr>
+      <p:sp>
+        <p:nvSpPr>
+          <p:cNvPr id="2" name="Slide Image Placeholder 1"/>
+          <p:cNvSpPr>
+            <a:spLocks noGrp="1" noRot="1" noChangeAspect="1"/>
+          </p:cNvSpPr>
+          <p:nvPr>
+            <p:ph type="sldImg"/>
+          </p:nvPr>
+        </p:nvSpPr>
+        <p:spPr/>
+      </p:sp>
+      <p:sp>
+        <p:nvSpPr>
+          <p:cNvPr id="3" name="Notes Placeholder 2"/>
+          <p:cNvSpPr>
+            <a:spLocks noGrp="1"/>
+          </p:cNvSpPr>
+          <p:nvPr>
+            <p:ph type="body" idx="1"/>
+          </p:nvPr>
+        </p:nvSpPr>
+        <p:spPr/>
+        <p:txBody>
+          <a:bodyPr/>
+          <a:lstStyle/>
+          <a:p>
+            <a:r>
+              <a:rPr lang="en-US" dirty="0"/>
+              <a:t>I complete the second page of the logbook: the matter taught, the evaluation, the homework and the attendance.</a:t>
+            </a:r>
+            <a:endParaRPr lang="en-US" dirty="0"/>
+          </a:p>
+        </p:txBody>
+      </p:sp>
+      <p:sp>
+        <p:nvSpPr>
+          <p:cNvPr id="4" name="Slide Number Placeholder 3"/>
+          <p:cNvSpPr>
+            <a:spLocks noGrp="1"/>
+          </p:cNvSpPr>
+          <p:nvPr>
+            <p:ph type="sldNum" sz="quarter" idx="10"/>
+          </p:nvPr>
+        </p:nvSpPr>
+        <p:spPr/>
+        <p:txBody>
+          <a:bodyPr/>
+          <a:lstStyle/>
+          <a:p>
+            <a:fld id="{F7021451-1387-4CA6-816F-3879F97B5CBC}" type="slidenum">
+              <a:rPr lang="en-US"/>
+              <a:t>47</a:t>
+            </a:fld>
+            <a:endParaRPr lang="en-US"/>
+          </a:p>
+        </p:txBody>
+      </p:sp>
+    </p:spTree>
+    <p:extLst>
+      <p:ext uri="{BB962C8B-B14F-4D97-AF65-F5344CB8AC3E}">
+        <p14:creationId xmlns:p14="http://schemas.microsoft.com/office/powerpoint/2010/main" val="1024086991"/>
+      </p:ext>
+    </p:extLst>
+  </p:cSld>
+  <p:clrMapOvr>
+    <a:masterClrMapping/>
+  </p:clrMapOvr>
+</p:notes>
+</file>
+
+<file path=ppt/notesSlides/notesSlide48.xml><?xml version="1.0" encoding="utf-8"?>
+<p:notes xmlns:a="http://schemas.openxmlformats.org/drawingml/2006/main" xmlns:r="http://schemas.openxmlformats.org/officeDocument/2006/relationships" xmlns:p="http://schemas.openxmlformats.org/presentationml/2006/main">
+  <p:cSld>
+    <p:spTree>
+      <p:nvGrpSpPr>
+        <p:cNvPr id="1" name=""/>
+        <p:cNvGrpSpPr/>
+        <p:nvPr/>
+      </p:nvGrpSpPr>
+      <p:grpSpPr>
+        <a:xfrm>
+          <a:off x="0" y="0"/>
+          <a:ext cx="0" cy="0"/>
+          <a:chOff x="0" y="0"/>
+          <a:chExt cx="0" cy="0"/>
+        </a:xfrm>
+      </p:grpSpPr>
+      <p:sp>
+        <p:nvSpPr>
+          <p:cNvPr id="2" name="Slide Image Placeholder 1"/>
+          <p:cNvSpPr>
+            <a:spLocks noGrp="1" noRot="1" noChangeAspect="1"/>
+          </p:cNvSpPr>
+          <p:nvPr>
+            <p:ph type="sldImg"/>
+          </p:nvPr>
+        </p:nvSpPr>
+        <p:spPr/>
+      </p:sp>
+      <p:sp>
+        <p:nvSpPr>
+          <p:cNvPr id="3" name="Notes Placeholder 2"/>
+          <p:cNvSpPr>
+            <a:spLocks noGrp="1"/>
+          </p:cNvSpPr>
+          <p:nvPr>
+            <p:ph type="body" idx="1"/>
+          </p:nvPr>
+        </p:nvSpPr>
+        <p:spPr/>
+        <p:txBody>
+          <a:bodyPr/>
+          <a:lstStyle/>
+          <a:p>
+            <a:r>
+              <a:rPr lang="en-US" dirty="0"/>
+              <a:t>This slide is for me, the teacher: it gives the timing of the lesson and what to do if the projector is not available.</a:t>
+            </a:r>
+            <a:endParaRPr lang="en-US" dirty="0"/>
+          </a:p>
+        </p:txBody>
+      </p:sp>
+      <p:sp>
+        <p:nvSpPr>
+          <p:cNvPr id="4" name="Slide Number Placeholder 3"/>
+          <p:cNvSpPr>
+            <a:spLocks noGrp="1"/>
+          </p:cNvSpPr>
+          <p:nvPr>
+            <p:ph type="sldNum" sz="quarter" idx="10"/>
+          </p:nvPr>
+        </p:nvSpPr>
+        <p:spPr/>
+        <p:txBody>
+          <a:bodyPr/>
+          <a:lstStyle/>
+          <a:p>
+            <a:fld id="{F7021451-1387-4CA6-816F-3879F97B5CBC}" type="slidenum">
+              <a:rPr lang="en-US"/>
+              <a:t>48</a:t>
+            </a:fld>
+            <a:endParaRPr lang="en-US"/>
+          </a:p>
+        </p:txBody>
+      </p:sp>
+    </p:spTree>
+    <p:extLst>
+      <p:ext uri="{BB962C8B-B14F-4D97-AF65-F5344CB8AC3E}">
+        <p14:creationId xmlns:p14="http://schemas.microsoft.com/office/powerpoint/2010/main" val="1024086991"/>
+      </p:ext>
+    </p:extLst>
+  </p:cSld>
+  <p:clrMapOvr>
+    <a:masterClrMapping/>
+  </p:clrMapOvr>
+</p:notes>
+</file>
+
+<file path=ppt/notesSlides/notesSlide49.xml><?xml version="1.0" encoding="utf-8"?>
+<p:notes xmlns:a="http://schemas.openxmlformats.org/drawingml/2006/main" xmlns:r="http://schemas.openxmlformats.org/officeDocument/2006/relationships" xmlns:p="http://schemas.openxmlformats.org/presentationml/2006/main">
+  <p:cSld>
+    <p:spTree>
+      <p:nvGrpSpPr>
+        <p:cNvPr id="1" name=""/>
+        <p:cNvGrpSpPr/>
+        <p:nvPr/>
+      </p:nvGrpSpPr>
+      <p:grpSpPr>
+        <a:xfrm>
+          <a:off x="0" y="0"/>
+          <a:ext cx="0" cy="0"/>
+          <a:chOff x="0" y="0"/>
+          <a:chExt cx="0" cy="0"/>
+        </a:xfrm>
+      </p:grpSpPr>
+      <p:sp>
+        <p:nvSpPr>
+          <p:cNvPr id="2" name="Slide Image Placeholder 1"/>
+          <p:cNvSpPr>
+            <a:spLocks noGrp="1" noRot="1" noChangeAspect="1"/>
+          </p:cNvSpPr>
+          <p:nvPr>
+            <p:ph type="sldImg"/>
+          </p:nvPr>
+        </p:nvSpPr>
+        <p:spPr/>
+      </p:sp>
+      <p:sp>
+        <p:nvSpPr>
+          <p:cNvPr id="3" name="Notes Placeholder 2"/>
+          <p:cNvSpPr>
+            <a:spLocks noGrp="1"/>
+          </p:cNvSpPr>
+          <p:nvPr>
+            <p:ph type="body" idx="1"/>
+          </p:nvPr>
+        </p:nvSpPr>
+        <p:spPr/>
+        <p:txBody>
+          <a:bodyPr/>
+          <a:lstStyle/>
+          <a:p>
+            <a:r>
+              <a:rPr lang="en-US" dirty="0"/>
+              <a:t>These are the references and picture credits used to prepare this lesson.</a:t>
+            </a:r>
+            <a:endParaRPr lang="en-US" dirty="0"/>
+          </a:p>
+        </p:txBody>
+      </p:sp>
+      <p:sp>
+        <p:nvSpPr>
+          <p:cNvPr id="4" name="Slide Number Placeholder 3"/>
+          <p:cNvSpPr>
+            <a:spLocks noGrp="1"/>
+          </p:cNvSpPr>
+          <p:nvPr>
+            <p:ph type="sldNum" sz="quarter" idx="10"/>
+          </p:nvPr>
+        </p:nvSpPr>
+        <p:spPr/>
+        <p:txBody>
+          <a:bodyPr/>
+          <a:lstStyle/>
+          <a:p>
+            <a:fld id="{F7021451-1387-4CA6-816F-3879F97B5CBC}" type="slidenum">
+              <a:rPr lang="en-US"/>
+              <a:t>49</a:t>
             </a:fld>
             <a:endParaRPr lang="en-US"/>
           </a:p>
@@ -5798,7 +6154,7 @@
         <p:spPr>
           <a:xfrm>
             <a:off x="0" y="658368"/>
-            <a:ext cx="5120640" cy="5833872"/>
+            <a:ext cx="2468880" cy="5833872"/>
           </a:xfrm>
           <a:prstGeom prst="rect">
             <a:avLst/>
@@ -5813,8 +6169,8 @@
         </p:nvSpPr>
         <p:spPr>
           <a:xfrm>
-            <a:off x="5349240" y="1005840"/>
-            <a:ext cx="6522415" cy="731520"/>
+            <a:off x="2697480" y="1005840"/>
+            <a:ext cx="9174175" cy="731520"/>
           </a:xfrm>
           <a:prstGeom prst="rect">
             <a:avLst/>
@@ -5854,8 +6210,8 @@
         </p:nvSpPr>
         <p:spPr>
           <a:xfrm>
-            <a:off x="5349240" y="1783080"/>
-            <a:ext cx="6522415" cy="4663440"/>
+            <a:off x="2697480" y="1783080"/>
+            <a:ext cx="9174175" cy="4663440"/>
           </a:xfrm>
           <a:prstGeom prst="rect">
             <a:avLst/>
@@ -5882,7 +6238,7 @@
                 <a:ea typeface="Times New Roman" pitchFamily="34" charset="-122"/>
                 <a:cs typeface="Times New Roman" pitchFamily="34" charset="-120"/>
               </a:rPr>
-              <a:t>On Monday morning, it rains in Garoua, so Idrissa takes an umbrella. His cousin in Paris says: "But Garoua has a hot climate. Why do you need an umbrella?"</a:t>
+              <a:t>On Monday morning it rains in Garoua, so Idrissa takes an umbrella. His cousin in Paris laughs: "But Garoua has a hot climate. Why do you need an umbrella?" Idrissa asks his teacher: "What is the difference between the weather and the climate, and how do we measure them?"</a:t>
             </a:r>
             <a:endParaRPr lang="en-US" sz="4000" dirty="0"/>
           </a:p>
@@ -6320,7 +6676,7 @@
                 <a:ea typeface="Times New Roman" pitchFamily="34" charset="-122"/>
                 <a:cs typeface="Times New Roman" pitchFamily="34" charset="-120"/>
               </a:rPr>
-              <a:t>The cousin mixes up weather and climate.</a:t>
+              <a:t>The cousin confuses weather and climate, and Idrissa does not know how they are measured.</a:t>
             </a:r>
             <a:endParaRPr lang="en-US" sz="4000" dirty="0"/>
           </a:p>
@@ -6758,7 +7114,7 @@
                 <a:ea typeface="Times New Roman" pitchFamily="34" charset="-122"/>
                 <a:cs typeface="Times New Roman" pitchFamily="34" charset="-120"/>
               </a:rPr>
-              <a:t>Cloudy and rainy.</a:t>
+              <a:t>It is rainy.</a:t>
             </a:r>
             <a:endParaRPr lang="en-US" sz="4000" dirty="0"/>
           </a:p>
@@ -7196,7 +7552,7 @@
                 <a:ea typeface="Times New Roman" pitchFamily="34" charset="-122"/>
                 <a:cs typeface="Times New Roman" pitchFamily="34" charset="-120"/>
               </a:rPr>
-              <a:t>Hot, with a wet and a dry season.</a:t>
+              <a:t>It is hot, with a wet season and a dry season (tropical).</a:t>
             </a:r>
             <a:endParaRPr lang="en-US" sz="4000" dirty="0"/>
           </a:p>
@@ -7746,7 +8102,7 @@
                 <a:ea typeface="Calibri" pitchFamily="34" charset="-122"/>
                 <a:cs typeface="Calibri" pitchFamily="34" charset="-120"/>
               </a:rPr>
-              <a:t>1. WEATHER AND CLIMATE</a:t>
+              <a:t>DEFINITIONS</a:t>
             </a:r>
             <a:endParaRPr lang="en-US" sz="1400" dirty="0"/>
           </a:p>
@@ -7848,7 +8204,7 @@
                 <a:ea typeface="Times New Roman" pitchFamily="34" charset="-122"/>
                 <a:cs typeface="Times New Roman" pitchFamily="34" charset="-120"/>
               </a:rPr>
-              <a:t>A rainy afternoon.</a:t>
+              <a:t>A rainy day.</a:t>
             </a:r>
             <a:endParaRPr lang="en-US" sz="1800" dirty="0"/>
           </a:p>
@@ -8555,7 +8911,7 @@
                 <a:ea typeface="Calibri" pitchFamily="34" charset="-122"/>
                 <a:cs typeface="Calibri" pitchFamily="34" charset="-120"/>
               </a:rPr>
-              <a:t>1. WEATHER AND CLIMATE</a:t>
+              <a:t>DEFINITIONS</a:t>
             </a:r>
             <a:endParaRPr lang="en-US" sz="1400" dirty="0"/>
           </a:p>
@@ -8662,7 +9018,7 @@
                 <a:ea typeface="Times New Roman" pitchFamily="34" charset="-122"/>
                 <a:cs typeface="Times New Roman" pitchFamily="34" charset="-120"/>
               </a:rPr>
-              <a:t>The condition of the air today is rainy. Is this the weather or the climate?</a:t>
+              <a:t>The air is rainy today. Is this the weather or the climate?</a:t>
             </a:r>
             <a:endParaRPr lang="en-US" sz="4000" dirty="0"/>
           </a:p>
@@ -8774,7 +9130,7 @@
                 <a:ea typeface="Calibri" pitchFamily="34" charset="-122"/>
                 <a:cs typeface="Calibri" pitchFamily="34" charset="-120"/>
               </a:rPr>
-              <a:t>1. WEATHER AND CLIMATE</a:t>
+              <a:t>DEFINITIONS</a:t>
             </a:r>
             <a:endParaRPr lang="en-US" sz="1400" dirty="0"/>
           </a:p>
@@ -8993,7 +9349,7 @@
                 <a:ea typeface="Calibri" pitchFamily="34" charset="-122"/>
                 <a:cs typeface="Calibri" pitchFamily="34" charset="-120"/>
               </a:rPr>
-              <a:t>2. THE WEATHER STATION</a:t>
+              <a:t>DEFINITIONS</a:t>
             </a:r>
             <a:endParaRPr lang="en-US" sz="1400" dirty="0"/>
           </a:p>
@@ -9207,7 +9563,7 @@
                 <a:ea typeface="Calibri" pitchFamily="34" charset="-122"/>
                 <a:cs typeface="Calibri" pitchFamily="34" charset="-120"/>
               </a:rPr>
-              <a:t>2. THE WEATHER STATION</a:t>
+              <a:t>DEFINITIONS</a:t>
             </a:r>
             <a:endParaRPr lang="en-US" sz="1400" dirty="0"/>
           </a:p>
@@ -9426,7 +9782,7 @@
                 <a:ea typeface="Calibri" pitchFamily="34" charset="-122"/>
                 <a:cs typeface="Calibri" pitchFamily="34" charset="-120"/>
               </a:rPr>
-              <a:t>2. THE WEATHER STATION</a:t>
+              <a:t>DEFINITIONS</a:t>
             </a:r>
             <a:endParaRPr lang="en-US" sz="1400" dirty="0"/>
           </a:p>
@@ -9533,7 +9889,7 @@
                 <a:ea typeface="Times New Roman" pitchFamily="34" charset="-122"/>
                 <a:cs typeface="Times New Roman" pitchFamily="34" charset="-120"/>
               </a:rPr>
-              <a:t>They measure the weather every day.</a:t>
+              <a:t>They measure and record the weather every day.</a:t>
             </a:r>
             <a:endParaRPr lang="en-US" sz="4000" dirty="0"/>
           </a:p>
@@ -9645,7 +10001,7 @@
                 <a:ea typeface="Calibri" pitchFamily="34" charset="-122"/>
                 <a:cs typeface="Calibri" pitchFamily="34" charset="-120"/>
               </a:rPr>
-              <a:t>3. WEATHER ELEMENTS AND INSTRUMENTS</a:t>
+              <a:t>1. WEATHER ELEMENTS AND INSTRUMENTS</a:t>
             </a:r>
             <a:endParaRPr lang="en-US" sz="1400" dirty="0"/>
           </a:p>
@@ -9747,7 +10103,7 @@
                 <a:ea typeface="Times New Roman" pitchFamily="34" charset="-122"/>
                 <a:cs typeface="Times New Roman" pitchFamily="34" charset="-120"/>
               </a:rPr>
-              <a:t>Instruments that measure the wind.</a:t>
+              <a:t>An instrument with cups on a mast.</a:t>
             </a:r>
             <a:endParaRPr lang="en-US" sz="1800" dirty="0"/>
           </a:p>
@@ -9859,7 +10215,7 @@
                 <a:ea typeface="Calibri" pitchFamily="34" charset="-122"/>
                 <a:cs typeface="Calibri" pitchFamily="34" charset="-120"/>
               </a:rPr>
-              <a:t>3. WEATHER ELEMENTS AND INSTRUMENTS</a:t>
+              <a:t>1. WEATHER ELEMENTS AND INSTRUMENTS</a:t>
             </a:r>
             <a:endParaRPr lang="en-US" sz="1400" dirty="0"/>
           </a:p>
@@ -9966,7 +10322,7 @@
                 <a:ea typeface="Times New Roman" pitchFamily="34" charset="-122"/>
                 <a:cs typeface="Times New Roman" pitchFamily="34" charset="-120"/>
               </a:rPr>
-              <a:t>Which instrument measures wind speed? Which one shows wind direction?</a:t>
+              <a:t>This instrument turns faster when the wind is strong. What does it measure?</a:t>
             </a:r>
             <a:endParaRPr lang="en-US" sz="4000" dirty="0"/>
           </a:p>
@@ -10078,7 +10434,7 @@
                 <a:ea typeface="Calibri" pitchFamily="34" charset="-122"/>
                 <a:cs typeface="Calibri" pitchFamily="34" charset="-120"/>
               </a:rPr>
-              <a:t>3. WEATHER ELEMENTS AND INSTRUMENTS</a:t>
+              <a:t>1. WEATHER ELEMENTS AND INSTRUMENTS</a:t>
             </a:r>
             <a:endParaRPr lang="en-US" sz="1400" dirty="0"/>
           </a:p>
@@ -10185,7 +10541,7 @@
                 <a:ea typeface="Times New Roman" pitchFamily="34" charset="-122"/>
                 <a:cs typeface="Times New Roman" pitchFamily="34" charset="-120"/>
               </a:rPr>
-              <a:t>The anemometer (speed); the wind vane (direction).</a:t>
+              <a:t>Wind speed: it is an anemometer.</a:t>
             </a:r>
             <a:endParaRPr lang="en-US" sz="4000" dirty="0"/>
           </a:p>
@@ -10621,7 +10977,7 @@
                 <a:ea typeface="Times New Roman" pitchFamily="34" charset="-122"/>
                 <a:cs typeface="Times New Roman" pitchFamily="34" charset="-120"/>
               </a:rPr>
-              <a:t>1. Weather and Climate</a:t>
+              <a:t>DEFINITIONS</a:t>
             </a:r>
             <a:endParaRPr lang="en-US" sz="3600" dirty="0"/>
           </a:p>
@@ -10663,7 +11019,7 @@
                 <a:ea typeface="Times New Roman" pitchFamily="34" charset="-122"/>
                 <a:cs typeface="Times New Roman" pitchFamily="34" charset="-120"/>
               </a:rPr>
-              <a:t>Weather and climate are defined as follows:</a:t>
+              <a:t>The key terms of this lesson are defined as follows:</a:t>
             </a:r>
             <a:endParaRPr lang="en-US" sz="4000" dirty="0"/>
           </a:p>
@@ -10700,7 +11056,7 @@
                 <a:ea typeface="Times New Roman" pitchFamily="34" charset="-122"/>
                 <a:cs typeface="Times New Roman" pitchFamily="34" charset="-120"/>
               </a:rPr>
-              <a:t>It is the condition of the atmosphere at a place at a given time.</a:t>
+              <a:t>It is the state of the atmosphere at a place at a given time.</a:t>
             </a:r>
             <a:endParaRPr lang="en-US" sz="4000" dirty="0"/>
           </a:p>
@@ -10737,7 +11093,7 @@
                 <a:ea typeface="Times New Roman" pitchFamily="34" charset="-122"/>
                 <a:cs typeface="Times New Roman" pitchFamily="34" charset="-120"/>
               </a:rPr>
-              <a:t>It is the average weather of a place over a long period of about 30 years.</a:t>
+              <a:t>It is the average weather conditions of a place over a long period, usually 30 years.</a:t>
             </a:r>
             <a:endParaRPr lang="en-US" sz="4000" dirty="0"/>
           </a:p>
@@ -11881,7 +12237,7 @@
         <p:spPr>
           <a:xfrm>
             <a:off x="0" y="658368"/>
-            <a:ext cx="5120640" cy="5833872"/>
+            <a:ext cx="3840480" cy="5833872"/>
           </a:xfrm>
           <a:prstGeom prst="rect">
             <a:avLst/>
@@ -11896,8 +12252,8 @@
         </p:nvSpPr>
         <p:spPr>
           <a:xfrm>
-            <a:off x="5349240" y="1005840"/>
-            <a:ext cx="6522415" cy="731520"/>
+            <a:off x="4069080" y="1005840"/>
+            <a:ext cx="7802575" cy="731520"/>
           </a:xfrm>
           <a:prstGeom prst="rect">
             <a:avLst/>
@@ -11923,7 +12279,7 @@
                 <a:ea typeface="Times New Roman" pitchFamily="34" charset="-122"/>
                 <a:cs typeface="Times New Roman" pitchFamily="34" charset="-120"/>
               </a:rPr>
-              <a:t>2. The Weather Station</a:t>
+              <a:t>DEFINITIONS (continued)</a:t>
             </a:r>
             <a:endParaRPr lang="en-US" sz="3600" dirty="0"/>
           </a:p>
@@ -11937,8 +12293,8 @@
         </p:nvSpPr>
         <p:spPr>
           <a:xfrm>
-            <a:off x="5349240" y="1783080"/>
-            <a:ext cx="6522415" cy="4663440"/>
+            <a:off x="4069080" y="1783080"/>
+            <a:ext cx="7802575" cy="4663440"/>
           </a:xfrm>
           <a:prstGeom prst="rect">
             <a:avLst/>
@@ -11957,7 +12313,7 @@
               <a:buNone/>
             </a:pPr>
             <a:r>
-              <a:rPr lang="en-US" sz="4000" i="1" dirty="0">
+              <a:rPr lang="en-US" sz="4000" b="1" dirty="0">
                 <a:solidFill>
                   <a:srgbClr val="111111"/>
                 </a:solidFill>
@@ -11965,11 +12321,8 @@
                 <a:ea typeface="Times New Roman" pitchFamily="34" charset="-122"/>
                 <a:cs typeface="Times New Roman" pitchFamily="34" charset="-120"/>
               </a:rPr>
-              <a:t>The weather station is defined as follows:</a:t>
-            </a:r>
-            <a:endParaRPr lang="en-US" sz="4000" dirty="0"/>
-          </a:p>
-          <a:p>
+              <a:t>Weather station: </a:t>
+            </a:r>
             <a:pPr algn="l" indent="0" marL="0">
               <a:spcAft>
                 <a:spcPts val="800"/>
@@ -11977,7 +12330,7 @@
               <a:buNone/>
             </a:pPr>
             <a:r>
-              <a:rPr lang="en-US" sz="4000" b="1" dirty="0">
+              <a:rPr lang="en-US" sz="4000" dirty="0">
                 <a:solidFill>
                   <a:srgbClr val="111111"/>
                 </a:solidFill>
@@ -11985,8 +12338,11 @@
                 <a:ea typeface="Times New Roman" pitchFamily="34" charset="-122"/>
                 <a:cs typeface="Times New Roman" pitchFamily="34" charset="-120"/>
               </a:rPr>
-              <a:t>Weather station: </a:t>
-            </a:r>
+              <a:t>It is a place where weather elements are measured and recorded with instruments.</a:t>
+            </a:r>
+            <a:endParaRPr lang="en-US" sz="4000" dirty="0"/>
+          </a:p>
+          <a:p>
             <a:pPr algn="l" indent="0" marL="0">
               <a:spcAft>
                 <a:spcPts val="800"/>
@@ -11994,7 +12350,7 @@
               <a:buNone/>
             </a:pPr>
             <a:r>
-              <a:rPr lang="en-US" sz="4000" dirty="0">
+              <a:rPr lang="en-US" sz="4000" b="1" dirty="0">
                 <a:solidFill>
                   <a:srgbClr val="111111"/>
                 </a:solidFill>
@@ -12002,7 +12358,24 @@
                 <a:ea typeface="Times New Roman" pitchFamily="34" charset="-122"/>
                 <a:cs typeface="Times New Roman" pitchFamily="34" charset="-120"/>
               </a:rPr>
-              <a:t>It is a place where weather elements are measured and recorded with instruments.</a:t>
+              <a:t>Isoline: </a:t>
+            </a:r>
+            <a:pPr algn="l" indent="0" marL="0">
+              <a:spcAft>
+                <a:spcPts val="800"/>
+              </a:spcAft>
+              <a:buNone/>
+            </a:pPr>
+            <a:r>
+              <a:rPr lang="en-US" sz="4000" dirty="0">
+                <a:solidFill>
+                  <a:srgbClr val="111111"/>
+                </a:solidFill>
+                <a:latin typeface="Times New Roman" pitchFamily="34" charset="0"/>
+                <a:ea typeface="Times New Roman" pitchFamily="34" charset="-122"/>
+                <a:cs typeface="Times New Roman" pitchFamily="34" charset="-120"/>
+              </a:rPr>
+              <a:t>It is a line on a map that joins places with the same value of a weather element.</a:t>
             </a:r>
             <a:endParaRPr lang="en-US" sz="4000" dirty="0"/>
           </a:p>
@@ -12120,9 +12493,129 @@
           </a:p>
         </p:txBody>
       </p:sp>
+      <p:sp>
+        <p:nvSpPr>
+          <p:cNvPr id="3" name="Text 1"/>
+          <p:cNvSpPr/>
+          <p:nvPr/>
+        </p:nvSpPr>
+        <p:spPr>
+          <a:xfrm>
+            <a:off x="365760" y="1005840"/>
+            <a:ext cx="11460175" cy="731520"/>
+          </a:xfrm>
+          <a:prstGeom prst="rect">
+            <a:avLst/>
+          </a:prstGeom>
+          <a:noFill/>
+          <a:ln/>
+        </p:spPr>
+        <p:txBody>
+          <a:bodyPr wrap="square" lIns="0" tIns="0" rIns="0" bIns="0" rtlCol="0" anchor="ctr">
+            <a:normAutofit/>
+          </a:bodyPr>
+          <a:lstStyle/>
+          <a:p>
+            <a:pPr algn="ctr" indent="0" marL="0">
+              <a:buNone/>
+            </a:pPr>
+            <a:r>
+              <a:rPr lang="en-US" sz="3600" b="1" dirty="0">
+                <a:solidFill>
+                  <a:srgbClr val="990011"/>
+                </a:solidFill>
+                <a:latin typeface="Times New Roman" pitchFamily="34" charset="0"/>
+                <a:ea typeface="Times New Roman" pitchFamily="34" charset="-122"/>
+                <a:cs typeface="Times New Roman" pitchFamily="34" charset="-120"/>
+              </a:rPr>
+              <a:t>1. Weather Elements, Instruments and Measurements</a:t>
+            </a:r>
+            <a:endParaRPr lang="en-US" sz="3600" dirty="0"/>
+          </a:p>
+        </p:txBody>
+      </p:sp>
+      <p:sp>
+        <p:nvSpPr>
+          <p:cNvPr id="4" name="Text 2"/>
+          <p:cNvSpPr/>
+          <p:nvPr/>
+        </p:nvSpPr>
+        <p:spPr>
+          <a:xfrm>
+            <a:off x="365760" y="1783080"/>
+            <a:ext cx="4846320" cy="4617720"/>
+          </a:xfrm>
+          <a:prstGeom prst="rect">
+            <a:avLst/>
+          </a:prstGeom>
+          <a:noFill/>
+          <a:ln/>
+        </p:spPr>
+        <p:txBody>
+          <a:bodyPr wrap="square" lIns="0" tIns="0" rIns="0" bIns="0" rtlCol="0" anchor="t"/>
+          <a:lstStyle/>
+          <a:p>
+            <a:pPr algn="l" indent="0" marL="0">
+              <a:spcAft>
+                <a:spcPts val="800"/>
+              </a:spcAft>
+              <a:buNone/>
+            </a:pPr>
+            <a:r>
+              <a:rPr lang="en-US" sz="3600" i="1" dirty="0">
+                <a:solidFill>
+                  <a:srgbClr val="111111"/>
+                </a:solidFill>
+                <a:latin typeface="Times New Roman" pitchFamily="34" charset="0"/>
+                <a:ea typeface="Times New Roman" pitchFamily="34" charset="-122"/>
+                <a:cs typeface="Times New Roman" pitchFamily="34" charset="-120"/>
+              </a:rPr>
+              <a:t>The weather elements are measured as follows:</a:t>
+            </a:r>
+            <a:endParaRPr lang="en-US" sz="3600" dirty="0"/>
+          </a:p>
+          <a:p>
+            <a:pPr algn="l" indent="0" marL="0">
+              <a:spcAft>
+                <a:spcPts val="800"/>
+              </a:spcAft>
+              <a:buNone/>
+            </a:pPr>
+            <a:r>
+              <a:rPr lang="en-US" sz="3600" b="1" dirty="0">
+                <a:solidFill>
+                  <a:srgbClr val="111111"/>
+                </a:solidFill>
+                <a:latin typeface="Times New Roman" pitchFamily="34" charset="0"/>
+                <a:ea typeface="Times New Roman" pitchFamily="34" charset="-122"/>
+                <a:cs typeface="Times New Roman" pitchFamily="34" charset="-120"/>
+              </a:rPr>
+              <a:t>Temperature: </a:t>
+            </a:r>
+            <a:pPr algn="l" indent="0" marL="0">
+              <a:spcAft>
+                <a:spcPts val="800"/>
+              </a:spcAft>
+              <a:buNone/>
+            </a:pPr>
+            <a:r>
+              <a:rPr lang="en-US" sz="3600" dirty="0">
+                <a:solidFill>
+                  <a:srgbClr val="111111"/>
+                </a:solidFill>
+                <a:latin typeface="Times New Roman" pitchFamily="34" charset="0"/>
+                <a:ea typeface="Times New Roman" pitchFamily="34" charset="-122"/>
+                <a:cs typeface="Times New Roman" pitchFamily="34" charset="-120"/>
+              </a:rPr>
+              <a:t>It is measured with a thermometer, in degrees Celsius (°C).</a:t>
+            </a:r>
+            <a:endParaRPr lang="en-US" sz="3600" dirty="0"/>
+          </a:p>
+        </p:txBody>
+      </p:sp>
       <p:pic>
         <p:nvPicPr>
-          <p:cNvPr id="3" name="Image 0" descr="/home/claude/f4/img/minesec_sheet.png">    </p:cNvPr>
+          <p:cNvPr id="5" name="Image 0" descr="/home/claude/f4/img/v2/instruments_big.png">    </p:cNvPr>
           <p:cNvPicPr>
             <a:picLocks noChangeAspect="1"/>
           </p:cNvPicPr>
@@ -12136,8 +12629,8 @@
         </p:blipFill>
         <p:spPr>
           <a:xfrm>
-            <a:off x="0" y="658368"/>
-            <a:ext cx="2468880" cy="5833872"/>
+            <a:off x="5349240" y="2617506"/>
+            <a:ext cx="6659575" cy="2601397"/>
           </a:xfrm>
           <a:prstGeom prst="rect">
             <a:avLst/>
@@ -12146,14 +12639,14 @@
       </p:pic>
       <p:sp>
         <p:nvSpPr>
-          <p:cNvPr id="4" name="Text 1"/>
+          <p:cNvPr id="6" name="Text 3"/>
           <p:cNvSpPr/>
           <p:nvPr/>
         </p:nvSpPr>
         <p:spPr>
           <a:xfrm>
-            <a:off x="2697480" y="1005840"/>
-            <a:ext cx="9174175" cy="731520"/>
+            <a:off x="5349240" y="6089904"/>
+            <a:ext cx="6659575" cy="347472"/>
           </a:xfrm>
           <a:prstGeom prst="rect">
             <a:avLst/>
@@ -12162,142 +12655,24 @@
           <a:ln/>
         </p:spPr>
         <p:txBody>
-          <a:bodyPr wrap="square" lIns="0" tIns="0" rIns="0" bIns="0" rtlCol="0" anchor="ctr">
-            <a:normAutofit/>
-          </a:bodyPr>
+          <a:bodyPr wrap="square" lIns="0" tIns="0" rIns="0" bIns="0" rtlCol="0" anchor="ctr"/>
           <a:lstStyle/>
           <a:p>
             <a:pPr algn="ctr" indent="0" marL="0">
               <a:buNone/>
             </a:pPr>
             <a:r>
-              <a:rPr lang="en-US" sz="3600" b="1" dirty="0">
-                <a:solidFill>
-                  <a:srgbClr val="990011"/>
+              <a:rPr lang="en-US" sz="1600" i="1" dirty="0">
+                <a:solidFill>
+                  <a:srgbClr val="555555"/>
                 </a:solidFill>
                 <a:latin typeface="Times New Roman" pitchFamily="34" charset="0"/>
                 <a:ea typeface="Times New Roman" pitchFamily="34" charset="-122"/>
                 <a:cs typeface="Times New Roman" pitchFamily="34" charset="-120"/>
               </a:rPr>
-              <a:t>3. Weather Elements, Instruments and Isolines</a:t>
-            </a:r>
-            <a:endParaRPr lang="en-US" sz="3600" dirty="0"/>
-          </a:p>
-        </p:txBody>
-      </p:sp>
-      <p:sp>
-        <p:nvSpPr>
-          <p:cNvPr id="5" name="Text 2"/>
-          <p:cNvSpPr/>
-          <p:nvPr/>
-        </p:nvSpPr>
-        <p:spPr>
-          <a:xfrm>
-            <a:off x="2697480" y="1783080"/>
-            <a:ext cx="9174175" cy="4663440"/>
-          </a:xfrm>
-          <a:prstGeom prst="rect">
-            <a:avLst/>
-          </a:prstGeom>
-          <a:noFill/>
-          <a:ln/>
-        </p:spPr>
-        <p:txBody>
-          <a:bodyPr wrap="square" lIns="0" tIns="0" rIns="0" bIns="0" rtlCol="0" anchor="t"/>
-          <a:lstStyle/>
-          <a:p>
-            <a:pPr algn="l" indent="0" marL="0">
-              <a:spcAft>
-                <a:spcPts val="800"/>
-              </a:spcAft>
-              <a:buNone/>
-            </a:pPr>
-            <a:r>
-              <a:rPr lang="en-US" sz="4000" i="1" dirty="0">
-                <a:solidFill>
-                  <a:srgbClr val="111111"/>
-                </a:solidFill>
-                <a:latin typeface="Times New Roman" pitchFamily="34" charset="0"/>
-                <a:ea typeface="Times New Roman" pitchFamily="34" charset="-122"/>
-                <a:cs typeface="Times New Roman" pitchFamily="34" charset="-120"/>
-              </a:rPr>
-              <a:t>Weather elements are measured and shown as follows:</a:t>
-            </a:r>
-            <a:endParaRPr lang="en-US" sz="4000" dirty="0"/>
-          </a:p>
-          <a:p>
-            <a:pPr algn="l" indent="0" marL="0">
-              <a:spcAft>
-                <a:spcPts val="800"/>
-              </a:spcAft>
-              <a:buNone/>
-            </a:pPr>
-            <a:r>
-              <a:rPr lang="en-US" sz="4000" b="1" dirty="0">
-                <a:solidFill>
-                  <a:srgbClr val="111111"/>
-                </a:solidFill>
-                <a:latin typeface="Times New Roman" pitchFamily="34" charset="0"/>
-                <a:ea typeface="Times New Roman" pitchFamily="34" charset="-122"/>
-                <a:cs typeface="Times New Roman" pitchFamily="34" charset="-120"/>
-              </a:rPr>
-              <a:t>Temperature: </a:t>
-            </a:r>
-            <a:pPr algn="l" indent="0" marL="0">
-              <a:spcAft>
-                <a:spcPts val="800"/>
-              </a:spcAft>
-              <a:buNone/>
-            </a:pPr>
-            <a:r>
-              <a:rPr lang="en-US" sz="4000" dirty="0">
-                <a:solidFill>
-                  <a:srgbClr val="111111"/>
-                </a:solidFill>
-                <a:latin typeface="Times New Roman" pitchFamily="34" charset="0"/>
-                <a:ea typeface="Times New Roman" pitchFamily="34" charset="-122"/>
-                <a:cs typeface="Times New Roman" pitchFamily="34" charset="-120"/>
-              </a:rPr>
-              <a:t>It is measured with a thermometer in °C and shown by isotherms.</a:t>
-            </a:r>
-            <a:endParaRPr lang="en-US" sz="4000" dirty="0"/>
-          </a:p>
-          <a:p>
-            <a:pPr algn="l" indent="0" marL="0">
-              <a:spcAft>
-                <a:spcPts val="800"/>
-              </a:spcAft>
-              <a:buNone/>
-            </a:pPr>
-            <a:r>
-              <a:rPr lang="en-US" sz="4000" b="1" dirty="0">
-                <a:solidFill>
-                  <a:srgbClr val="111111"/>
-                </a:solidFill>
-                <a:latin typeface="Times New Roman" pitchFamily="34" charset="0"/>
-                <a:ea typeface="Times New Roman" pitchFamily="34" charset="-122"/>
-                <a:cs typeface="Times New Roman" pitchFamily="34" charset="-120"/>
-              </a:rPr>
-              <a:t>Rainfall: </a:t>
-            </a:r>
-            <a:pPr algn="l" indent="0" marL="0">
-              <a:spcAft>
-                <a:spcPts val="800"/>
-              </a:spcAft>
-              <a:buNone/>
-            </a:pPr>
-            <a:r>
-              <a:rPr lang="en-US" sz="4000" dirty="0">
-                <a:solidFill>
-                  <a:srgbClr val="111111"/>
-                </a:solidFill>
-                <a:latin typeface="Times New Roman" pitchFamily="34" charset="0"/>
-                <a:ea typeface="Times New Roman" pitchFamily="34" charset="-122"/>
-                <a:cs typeface="Times New Roman" pitchFamily="34" charset="-120"/>
-              </a:rPr>
-              <a:t>It is measured with a rain gauge in mm and shown by isohyets.</a:t>
-            </a:r>
-            <a:endParaRPr lang="en-US" sz="4000" dirty="0"/>
+              <a:t>Illustration: weather instruments</a:t>
+            </a:r>
+            <a:endParaRPr lang="en-US" sz="1600" dirty="0"/>
           </a:p>
         </p:txBody>
       </p:sp>
@@ -12413,9 +12788,109 @@
           </a:p>
         </p:txBody>
       </p:sp>
+      <p:sp>
+        <p:nvSpPr>
+          <p:cNvPr id="3" name="Text 1"/>
+          <p:cNvSpPr/>
+          <p:nvPr/>
+        </p:nvSpPr>
+        <p:spPr>
+          <a:xfrm>
+            <a:off x="365760" y="1005840"/>
+            <a:ext cx="11460175" cy="731520"/>
+          </a:xfrm>
+          <a:prstGeom prst="rect">
+            <a:avLst/>
+          </a:prstGeom>
+          <a:noFill/>
+          <a:ln/>
+        </p:spPr>
+        <p:txBody>
+          <a:bodyPr wrap="square" lIns="0" tIns="0" rIns="0" bIns="0" rtlCol="0" anchor="ctr">
+            <a:normAutofit/>
+          </a:bodyPr>
+          <a:lstStyle/>
+          <a:p>
+            <a:pPr algn="ctr" indent="0" marL="0">
+              <a:buNone/>
+            </a:pPr>
+            <a:r>
+              <a:rPr lang="en-US" sz="3600" b="1" dirty="0">
+                <a:solidFill>
+                  <a:srgbClr val="990011"/>
+                </a:solidFill>
+                <a:latin typeface="Times New Roman" pitchFamily="34" charset="0"/>
+                <a:ea typeface="Times New Roman" pitchFamily="34" charset="-122"/>
+                <a:cs typeface="Times New Roman" pitchFamily="34" charset="-120"/>
+              </a:rPr>
+              <a:t>1. Weather Elements, Instruments and Measurements</a:t>
+            </a:r>
+            <a:endParaRPr lang="en-US" sz="3600" dirty="0"/>
+          </a:p>
+        </p:txBody>
+      </p:sp>
+      <p:sp>
+        <p:nvSpPr>
+          <p:cNvPr id="4" name="Text 2"/>
+          <p:cNvSpPr/>
+          <p:nvPr/>
+        </p:nvSpPr>
+        <p:spPr>
+          <a:xfrm>
+            <a:off x="365760" y="1783080"/>
+            <a:ext cx="4846320" cy="4617720"/>
+          </a:xfrm>
+          <a:prstGeom prst="rect">
+            <a:avLst/>
+          </a:prstGeom>
+          <a:noFill/>
+          <a:ln/>
+        </p:spPr>
+        <p:txBody>
+          <a:bodyPr wrap="square" lIns="0" tIns="0" rIns="0" bIns="0" rtlCol="0" anchor="t"/>
+          <a:lstStyle/>
+          <a:p>
+            <a:pPr algn="l" indent="0" marL="0">
+              <a:spcAft>
+                <a:spcPts val="800"/>
+              </a:spcAft>
+              <a:buNone/>
+            </a:pPr>
+            <a:r>
+              <a:rPr lang="en-US" sz="3600" b="1" dirty="0">
+                <a:solidFill>
+                  <a:srgbClr val="111111"/>
+                </a:solidFill>
+                <a:latin typeface="Times New Roman" pitchFamily="34" charset="0"/>
+                <a:ea typeface="Times New Roman" pitchFamily="34" charset="-122"/>
+                <a:cs typeface="Times New Roman" pitchFamily="34" charset="-120"/>
+              </a:rPr>
+              <a:t>Rainfall: </a:t>
+            </a:r>
+            <a:pPr algn="l" indent="0" marL="0">
+              <a:spcAft>
+                <a:spcPts val="800"/>
+              </a:spcAft>
+              <a:buNone/>
+            </a:pPr>
+            <a:r>
+              <a:rPr lang="en-US" sz="3600" dirty="0">
+                <a:solidFill>
+                  <a:srgbClr val="111111"/>
+                </a:solidFill>
+                <a:latin typeface="Times New Roman" pitchFamily="34" charset="0"/>
+                <a:ea typeface="Times New Roman" pitchFamily="34" charset="-122"/>
+                <a:cs typeface="Times New Roman" pitchFamily="34" charset="-120"/>
+              </a:rPr>
+              <a:t>It is measured with a rain gauge, in millimetres (mm).</a:t>
+            </a:r>
+            <a:endParaRPr lang="en-US" sz="3600" dirty="0"/>
+          </a:p>
+        </p:txBody>
+      </p:sp>
       <p:pic>
         <p:nvPicPr>
-          <p:cNvPr id="3" name="Image 0" descr="/home/claude/f4/img/minesec_sheet.png">    </p:cNvPr>
+          <p:cNvPr id="5" name="Image 0" descr="/home/claude/f4/img/v2/f4_raingauge.jpg">    </p:cNvPr>
           <p:cNvPicPr>
             <a:picLocks noChangeAspect="1"/>
           </p:cNvPicPr>
@@ -12429,8 +12904,8 @@
         </p:blipFill>
         <p:spPr>
           <a:xfrm>
-            <a:off x="0" y="658368"/>
-            <a:ext cx="3840480" cy="5833872"/>
+            <a:off x="5349240" y="2070315"/>
+            <a:ext cx="6659575" cy="3695777"/>
           </a:xfrm>
           <a:prstGeom prst="rect">
             <a:avLst/>
@@ -12439,14 +12914,14 @@
       </p:pic>
       <p:sp>
         <p:nvSpPr>
-          <p:cNvPr id="4" name="Text 1"/>
+          <p:cNvPr id="6" name="Text 3"/>
           <p:cNvSpPr/>
           <p:nvPr/>
         </p:nvSpPr>
         <p:spPr>
           <a:xfrm>
-            <a:off x="4069080" y="1005840"/>
-            <a:ext cx="7802575" cy="731520"/>
+            <a:off x="5349240" y="6089904"/>
+            <a:ext cx="6659575" cy="347472"/>
           </a:xfrm>
           <a:prstGeom prst="rect">
             <a:avLst/>
@@ -12455,122 +12930,24 @@
           <a:ln/>
         </p:spPr>
         <p:txBody>
-          <a:bodyPr wrap="square" lIns="0" tIns="0" rIns="0" bIns="0" rtlCol="0" anchor="ctr">
-            <a:normAutofit/>
-          </a:bodyPr>
+          <a:bodyPr wrap="square" lIns="0" tIns="0" rIns="0" bIns="0" rtlCol="0" anchor="ctr"/>
           <a:lstStyle/>
           <a:p>
             <a:pPr algn="ctr" indent="0" marL="0">
               <a:buNone/>
             </a:pPr>
             <a:r>
-              <a:rPr lang="en-US" sz="3600" b="1" dirty="0">
-                <a:solidFill>
-                  <a:srgbClr val="990011"/>
+              <a:rPr lang="en-US" sz="1600" i="1" dirty="0">
+                <a:solidFill>
+                  <a:srgbClr val="555555"/>
                 </a:solidFill>
                 <a:latin typeface="Times New Roman" pitchFamily="34" charset="0"/>
                 <a:ea typeface="Times New Roman" pitchFamily="34" charset="-122"/>
                 <a:cs typeface="Times New Roman" pitchFamily="34" charset="-120"/>
               </a:rPr>
-              <a:t>3. Weather Elements, Instruments and Isolines (continued)</a:t>
-            </a:r>
-            <a:endParaRPr lang="en-US" sz="3600" dirty="0"/>
-          </a:p>
-        </p:txBody>
-      </p:sp>
-      <p:sp>
-        <p:nvSpPr>
-          <p:cNvPr id="5" name="Text 2"/>
-          <p:cNvSpPr/>
-          <p:nvPr/>
-        </p:nvSpPr>
-        <p:spPr>
-          <a:xfrm>
-            <a:off x="4069080" y="1783080"/>
-            <a:ext cx="7802575" cy="4663440"/>
-          </a:xfrm>
-          <a:prstGeom prst="rect">
-            <a:avLst/>
-          </a:prstGeom>
-          <a:noFill/>
-          <a:ln/>
-        </p:spPr>
-        <p:txBody>
-          <a:bodyPr wrap="square" lIns="0" tIns="0" rIns="0" bIns="0" rtlCol="0" anchor="t"/>
-          <a:lstStyle/>
-          <a:p>
-            <a:pPr algn="l" indent="0" marL="0">
-              <a:spcAft>
-                <a:spcPts val="800"/>
-              </a:spcAft>
-              <a:buNone/>
-            </a:pPr>
-            <a:r>
-              <a:rPr lang="en-US" sz="4000" b="1" dirty="0">
-                <a:solidFill>
-                  <a:srgbClr val="111111"/>
-                </a:solidFill>
-                <a:latin typeface="Times New Roman" pitchFamily="34" charset="0"/>
-                <a:ea typeface="Times New Roman" pitchFamily="34" charset="-122"/>
-                <a:cs typeface="Times New Roman" pitchFamily="34" charset="-120"/>
-              </a:rPr>
-              <a:t>Wind: </a:t>
-            </a:r>
-            <a:pPr algn="l" indent="0" marL="0">
-              <a:spcAft>
-                <a:spcPts val="800"/>
-              </a:spcAft>
-              <a:buNone/>
-            </a:pPr>
-            <a:r>
-              <a:rPr lang="en-US" sz="4000" dirty="0">
-                <a:solidFill>
-                  <a:srgbClr val="111111"/>
-                </a:solidFill>
-                <a:latin typeface="Times New Roman" pitchFamily="34" charset="0"/>
-                <a:ea typeface="Times New Roman" pitchFamily="34" charset="-122"/>
-                <a:cs typeface="Times New Roman" pitchFamily="34" charset="-120"/>
-              </a:rPr>
-              <a:t>Its direction is shown by a wind vane and its speed is measured with an anemometer.</a:t>
-            </a:r>
-            <a:endParaRPr lang="en-US" sz="4000" dirty="0"/>
-          </a:p>
-          <a:p>
-            <a:pPr algn="l" indent="0" marL="0">
-              <a:spcAft>
-                <a:spcPts val="800"/>
-              </a:spcAft>
-              <a:buNone/>
-            </a:pPr>
-            <a:r>
-              <a:rPr lang="en-US" sz="4000" b="1" dirty="0">
-                <a:solidFill>
-                  <a:srgbClr val="111111"/>
-                </a:solidFill>
-                <a:latin typeface="Times New Roman" pitchFamily="34" charset="0"/>
-                <a:ea typeface="Times New Roman" pitchFamily="34" charset="-122"/>
-                <a:cs typeface="Times New Roman" pitchFamily="34" charset="-120"/>
-              </a:rPr>
-              <a:t>Air pressure: </a:t>
-            </a:r>
-            <a:pPr algn="l" indent="0" marL="0">
-              <a:spcAft>
-                <a:spcPts val="800"/>
-              </a:spcAft>
-              <a:buNone/>
-            </a:pPr>
-            <a:r>
-              <a:rPr lang="en-US" sz="4000" dirty="0">
-                <a:solidFill>
-                  <a:srgbClr val="111111"/>
-                </a:solidFill>
-                <a:latin typeface="Times New Roman" pitchFamily="34" charset="0"/>
-                <a:ea typeface="Times New Roman" pitchFamily="34" charset="-122"/>
-                <a:cs typeface="Times New Roman" pitchFamily="34" charset="-120"/>
-              </a:rPr>
-              <a:t>It is measured with a barometer in millibars and shown by isobars.</a:t>
-            </a:r>
-            <a:endParaRPr lang="en-US" sz="4000" dirty="0"/>
+              <a:t>Illustration: a rain gauge</a:t>
+            </a:r>
+            <a:endParaRPr lang="en-US" sz="1600" dirty="0"/>
           </a:p>
         </p:txBody>
       </p:sp>
@@ -12686,48 +13063,9 @@
           </a:p>
         </p:txBody>
       </p:sp>
-      <p:sp>
-        <p:nvSpPr>
-          <p:cNvPr id="3" name="Text 1"/>
-          <p:cNvSpPr/>
-          <p:nvPr/>
-        </p:nvSpPr>
-        <p:spPr>
-          <a:xfrm>
-            <a:off x="457200" y="1005840"/>
-            <a:ext cx="11277295" cy="731520"/>
-          </a:xfrm>
-          <a:prstGeom prst="rect">
-            <a:avLst/>
-          </a:prstGeom>
-          <a:noFill/>
-          <a:ln/>
-        </p:spPr>
-        <p:txBody>
-          <a:bodyPr wrap="square" lIns="0" tIns="0" rIns="0" bIns="0" rtlCol="0" anchor="ctr"/>
-          <a:lstStyle/>
-          <a:p>
-            <a:pPr algn="ctr" indent="0" marL="0">
-              <a:buNone/>
-            </a:pPr>
-            <a:r>
-              <a:rPr lang="en-US" sz="3600" b="1" dirty="0">
-                <a:solidFill>
-                  <a:srgbClr val="990011"/>
-                </a:solidFill>
-                <a:latin typeface="Times New Roman" pitchFamily="34" charset="0"/>
-                <a:ea typeface="Times New Roman" pitchFamily="34" charset="-122"/>
-                <a:cs typeface="Times New Roman" pitchFamily="34" charset="-120"/>
-              </a:rPr>
-              <a:t>3. Weather Elements, Instruments and Isolines</a:t>
-            </a:r>
-            <a:endParaRPr lang="en-US" sz="3600" dirty="0"/>
-          </a:p>
-        </p:txBody>
-      </p:sp>
       <p:pic>
         <p:nvPicPr>
-          <p:cNvPr id="4" name="Image 0" descr="/home/claude/f4/img/v2/instruments_big.png">    </p:cNvPr>
+          <p:cNvPr id="3" name="Image 0" descr="/home/claude/f4/img/minesec_sheet.png">    </p:cNvPr>
           <p:cNvPicPr>
             <a:picLocks noChangeAspect="1"/>
           </p:cNvPicPr>
@@ -12741,8 +13079,8 @@
         </p:blipFill>
         <p:spPr>
           <a:xfrm>
-            <a:off x="629930" y="1783080"/>
-            <a:ext cx="10931835" cy="4270248"/>
+            <a:off x="0" y="658368"/>
+            <a:ext cx="5120640" cy="5833872"/>
           </a:xfrm>
           <a:prstGeom prst="rect">
             <a:avLst/>
@@ -12751,14 +13089,14 @@
       </p:pic>
       <p:sp>
         <p:nvSpPr>
-          <p:cNvPr id="5" name="Text 2"/>
+          <p:cNvPr id="4" name="Text 1"/>
           <p:cNvSpPr/>
           <p:nvPr/>
         </p:nvSpPr>
         <p:spPr>
           <a:xfrm>
-            <a:off x="457200" y="6089904"/>
-            <a:ext cx="11277295" cy="347472"/>
+            <a:off x="5349240" y="1005840"/>
+            <a:ext cx="6522415" cy="731520"/>
           </a:xfrm>
           <a:prstGeom prst="rect">
             <a:avLst/>
@@ -12767,24 +13105,122 @@
           <a:ln/>
         </p:spPr>
         <p:txBody>
-          <a:bodyPr wrap="square" lIns="0" tIns="0" rIns="0" bIns="0" rtlCol="0" anchor="ctr"/>
+          <a:bodyPr wrap="square" lIns="0" tIns="0" rIns="0" bIns="0" rtlCol="0" anchor="ctr">
+            <a:normAutofit/>
+          </a:bodyPr>
           <a:lstStyle/>
           <a:p>
             <a:pPr algn="ctr" indent="0" marL="0">
               <a:buNone/>
             </a:pPr>
             <a:r>
-              <a:rPr lang="en-US" sz="1800" i="1" dirty="0">
-                <a:solidFill>
-                  <a:srgbClr val="555555"/>
+              <a:rPr lang="en-US" sz="3600" b="1" dirty="0">
+                <a:solidFill>
+                  <a:srgbClr val="990011"/>
                 </a:solidFill>
                 <a:latin typeface="Times New Roman" pitchFamily="34" charset="0"/>
                 <a:ea typeface="Times New Roman" pitchFamily="34" charset="-122"/>
                 <a:cs typeface="Times New Roman" pitchFamily="34" charset="-120"/>
               </a:rPr>
-              <a:t>Illustration: weather instruments</a:t>
-            </a:r>
-            <a:endParaRPr lang="en-US" sz="1800" dirty="0"/>
+              <a:t>1. Weather Elements, Instruments and Measurements</a:t>
+            </a:r>
+            <a:endParaRPr lang="en-US" sz="3600" dirty="0"/>
+          </a:p>
+        </p:txBody>
+      </p:sp>
+      <p:sp>
+        <p:nvSpPr>
+          <p:cNvPr id="5" name="Text 2"/>
+          <p:cNvSpPr/>
+          <p:nvPr/>
+        </p:nvSpPr>
+        <p:spPr>
+          <a:xfrm>
+            <a:off x="5349240" y="1783080"/>
+            <a:ext cx="6522415" cy="4663440"/>
+          </a:xfrm>
+          <a:prstGeom prst="rect">
+            <a:avLst/>
+          </a:prstGeom>
+          <a:noFill/>
+          <a:ln/>
+        </p:spPr>
+        <p:txBody>
+          <a:bodyPr wrap="square" lIns="0" tIns="0" rIns="0" bIns="0" rtlCol="0" anchor="t"/>
+          <a:lstStyle/>
+          <a:p>
+            <a:pPr algn="l" indent="0" marL="0">
+              <a:spcAft>
+                <a:spcPts val="800"/>
+              </a:spcAft>
+              <a:buNone/>
+            </a:pPr>
+            <a:r>
+              <a:rPr lang="en-US" sz="4000" b="1" dirty="0">
+                <a:solidFill>
+                  <a:srgbClr val="111111"/>
+                </a:solidFill>
+                <a:latin typeface="Times New Roman" pitchFamily="34" charset="0"/>
+                <a:ea typeface="Times New Roman" pitchFamily="34" charset="-122"/>
+                <a:cs typeface="Times New Roman" pitchFamily="34" charset="-120"/>
+              </a:rPr>
+              <a:t>Humidity: </a:t>
+            </a:r>
+            <a:pPr algn="l" indent="0" marL="0">
+              <a:spcAft>
+                <a:spcPts val="800"/>
+              </a:spcAft>
+              <a:buNone/>
+            </a:pPr>
+            <a:r>
+              <a:rPr lang="en-US" sz="4000" dirty="0">
+                <a:solidFill>
+                  <a:srgbClr val="111111"/>
+                </a:solidFill>
+                <a:latin typeface="Times New Roman" pitchFamily="34" charset="0"/>
+                <a:ea typeface="Times New Roman" pitchFamily="34" charset="-122"/>
+                <a:cs typeface="Times New Roman" pitchFamily="34" charset="-120"/>
+              </a:rPr>
+              <a:t>It is measured with a hygrometer, in per cent (%).</a:t>
+            </a:r>
+            <a:endParaRPr lang="en-US" sz="4000" dirty="0"/>
+          </a:p>
+          <a:p>
+            <a:pPr algn="l" indent="0" marL="0">
+              <a:spcAft>
+                <a:spcPts val="800"/>
+              </a:spcAft>
+              <a:buNone/>
+            </a:pPr>
+            <a:r>
+              <a:rPr lang="en-US" sz="4000" b="1" dirty="0">
+                <a:solidFill>
+                  <a:srgbClr val="111111"/>
+                </a:solidFill>
+                <a:latin typeface="Times New Roman" pitchFamily="34" charset="0"/>
+                <a:ea typeface="Times New Roman" pitchFamily="34" charset="-122"/>
+                <a:cs typeface="Times New Roman" pitchFamily="34" charset="-120"/>
+              </a:rPr>
+              <a:t>Air pressure: </a:t>
+            </a:r>
+            <a:pPr algn="l" indent="0" marL="0">
+              <a:spcAft>
+                <a:spcPts val="800"/>
+              </a:spcAft>
+              <a:buNone/>
+            </a:pPr>
+            <a:r>
+              <a:rPr lang="en-US" sz="4000" dirty="0">
+                <a:solidFill>
+                  <a:srgbClr val="111111"/>
+                </a:solidFill>
+                <a:latin typeface="Times New Roman" pitchFamily="34" charset="0"/>
+                <a:ea typeface="Times New Roman" pitchFamily="34" charset="-122"/>
+                <a:cs typeface="Times New Roman" pitchFamily="34" charset="-120"/>
+              </a:rPr>
+              <a:t>It is measured with a barometer, in millibars (mb).</a:t>
+            </a:r>
+            <a:endParaRPr lang="en-US" sz="4000" dirty="0"/>
           </a:p>
         </p:txBody>
       </p:sp>
@@ -12894,15 +13330,115 @@
                 <a:ea typeface="Calibri" pitchFamily="34" charset="-122"/>
                 <a:cs typeface="Calibri" pitchFamily="34" charset="-120"/>
               </a:rPr>
-              <a:t>FORMATIVE EVALUATION</a:t>
+              <a:t>BOARD SUMMARY</a:t>
             </a:r>
             <a:endParaRPr lang="en-US" sz="1400" dirty="0"/>
+          </a:p>
+        </p:txBody>
+      </p:sp>
+      <p:sp>
+        <p:nvSpPr>
+          <p:cNvPr id="3" name="Text 1"/>
+          <p:cNvSpPr/>
+          <p:nvPr/>
+        </p:nvSpPr>
+        <p:spPr>
+          <a:xfrm>
+            <a:off x="365760" y="1005840"/>
+            <a:ext cx="11460175" cy="731520"/>
+          </a:xfrm>
+          <a:prstGeom prst="rect">
+            <a:avLst/>
+          </a:prstGeom>
+          <a:noFill/>
+          <a:ln/>
+        </p:spPr>
+        <p:txBody>
+          <a:bodyPr wrap="square" lIns="0" tIns="0" rIns="0" bIns="0" rtlCol="0" anchor="ctr">
+            <a:normAutofit/>
+          </a:bodyPr>
+          <a:lstStyle/>
+          <a:p>
+            <a:pPr algn="ctr" indent="0" marL="0">
+              <a:buNone/>
+            </a:pPr>
+            <a:r>
+              <a:rPr lang="en-US" sz="3600" b="1" dirty="0">
+                <a:solidFill>
+                  <a:srgbClr val="990011"/>
+                </a:solidFill>
+                <a:latin typeface="Times New Roman" pitchFamily="34" charset="0"/>
+                <a:ea typeface="Times New Roman" pitchFamily="34" charset="-122"/>
+                <a:cs typeface="Times New Roman" pitchFamily="34" charset="-120"/>
+              </a:rPr>
+              <a:t>1. Weather Elements, Instruments and Measurements</a:t>
+            </a:r>
+            <a:endParaRPr lang="en-US" sz="3600" dirty="0"/>
+          </a:p>
+        </p:txBody>
+      </p:sp>
+      <p:sp>
+        <p:nvSpPr>
+          <p:cNvPr id="4" name="Text 2"/>
+          <p:cNvSpPr/>
+          <p:nvPr/>
+        </p:nvSpPr>
+        <p:spPr>
+          <a:xfrm>
+            <a:off x="365760" y="1783080"/>
+            <a:ext cx="4846320" cy="4617720"/>
+          </a:xfrm>
+          <a:prstGeom prst="rect">
+            <a:avLst/>
+          </a:prstGeom>
+          <a:noFill/>
+          <a:ln/>
+        </p:spPr>
+        <p:txBody>
+          <a:bodyPr wrap="square" lIns="0" tIns="0" rIns="0" bIns="0" rtlCol="0" anchor="t"/>
+          <a:lstStyle/>
+          <a:p>
+            <a:pPr algn="l" indent="0" marL="0">
+              <a:spcAft>
+                <a:spcPts val="800"/>
+              </a:spcAft>
+              <a:buNone/>
+            </a:pPr>
+            <a:r>
+              <a:rPr lang="en-US" sz="3600" b="1" dirty="0">
+                <a:solidFill>
+                  <a:srgbClr val="111111"/>
+                </a:solidFill>
+                <a:latin typeface="Times New Roman" pitchFamily="34" charset="0"/>
+                <a:ea typeface="Times New Roman" pitchFamily="34" charset="-122"/>
+                <a:cs typeface="Times New Roman" pitchFamily="34" charset="-120"/>
+              </a:rPr>
+              <a:t>Wind: </a:t>
+            </a:r>
+            <a:pPr algn="l" indent="0" marL="0">
+              <a:spcAft>
+                <a:spcPts val="800"/>
+              </a:spcAft>
+              <a:buNone/>
+            </a:pPr>
+            <a:r>
+              <a:rPr lang="en-US" sz="3600" dirty="0">
+                <a:solidFill>
+                  <a:srgbClr val="111111"/>
+                </a:solidFill>
+                <a:latin typeface="Times New Roman" pitchFamily="34" charset="0"/>
+                <a:ea typeface="Times New Roman" pitchFamily="34" charset="-122"/>
+                <a:cs typeface="Times New Roman" pitchFamily="34" charset="-120"/>
+              </a:rPr>
+              <a:t>Its direction is shown by a wind vane, and its speed is measured with an anemometer, in km/h or knots.</a:t>
+            </a:r>
+            <a:endParaRPr lang="en-US" sz="3600" dirty="0"/>
           </a:p>
         </p:txBody>
       </p:sp>
       <p:pic>
         <p:nvPicPr>
-          <p:cNvPr id="3" name="Image 0" descr="/home/claude/f4/img/minesec_sheet.png">    </p:cNvPr>
+          <p:cNvPr id="5" name="Image 0" descr="/home/claude/f4/img/v2/f4_anemometer.jpg">    </p:cNvPr>
           <p:cNvPicPr>
             <a:picLocks noChangeAspect="1"/>
           </p:cNvPicPr>
@@ -12916,8 +13452,8 @@
         </p:blipFill>
         <p:spPr>
           <a:xfrm>
-            <a:off x="0" y="658368"/>
-            <a:ext cx="5120640" cy="5833872"/>
+            <a:off x="5349240" y="2071212"/>
+            <a:ext cx="6659575" cy="3693983"/>
           </a:xfrm>
           <a:prstGeom prst="rect">
             <a:avLst/>
@@ -12926,14 +13462,14 @@
       </p:pic>
       <p:sp>
         <p:nvSpPr>
-          <p:cNvPr id="4" name="Text 1"/>
+          <p:cNvPr id="6" name="Text 3"/>
           <p:cNvSpPr/>
           <p:nvPr/>
         </p:nvSpPr>
         <p:spPr>
           <a:xfrm>
-            <a:off x="5349240" y="1005840"/>
-            <a:ext cx="6522415" cy="731520"/>
+            <a:off x="5349240" y="6089904"/>
+            <a:ext cx="6659575" cy="347472"/>
           </a:xfrm>
           <a:prstGeom prst="rect">
             <a:avLst/>
@@ -12942,68 +13478,24 @@
           <a:ln/>
         </p:spPr>
         <p:txBody>
-          <a:bodyPr wrap="square" lIns="0" tIns="0" rIns="0" bIns="0" rtlCol="0" anchor="ctr">
-            <a:normAutofit/>
-          </a:bodyPr>
+          <a:bodyPr wrap="square" lIns="0" tIns="0" rIns="0" bIns="0" rtlCol="0" anchor="ctr"/>
           <a:lstStyle/>
           <a:p>
             <a:pPr algn="ctr" indent="0" marL="0">
               <a:buNone/>
             </a:pPr>
             <a:r>
-              <a:rPr lang="en-US" sz="3600" b="1" dirty="0">
-                <a:solidFill>
-                  <a:srgbClr val="990011"/>
+              <a:rPr lang="en-US" sz="1600" i="1" dirty="0">
+                <a:solidFill>
+                  <a:srgbClr val="555555"/>
                 </a:solidFill>
                 <a:latin typeface="Times New Roman" pitchFamily="34" charset="0"/>
                 <a:ea typeface="Times New Roman" pitchFamily="34" charset="-122"/>
                 <a:cs typeface="Times New Roman" pitchFamily="34" charset="-120"/>
               </a:rPr>
-              <a:t>Evaluation 1</a:t>
-            </a:r>
-            <a:endParaRPr lang="en-US" sz="3600" dirty="0"/>
-          </a:p>
-        </p:txBody>
-      </p:sp>
-      <p:sp>
-        <p:nvSpPr>
-          <p:cNvPr id="5" name="Text 2"/>
-          <p:cNvSpPr/>
-          <p:nvPr/>
-        </p:nvSpPr>
-        <p:spPr>
-          <a:xfrm>
-            <a:off x="5349240" y="1783080"/>
-            <a:ext cx="6522415" cy="4663440"/>
-          </a:xfrm>
-          <a:prstGeom prst="rect">
-            <a:avLst/>
-          </a:prstGeom>
-          <a:noFill/>
-          <a:ln/>
-        </p:spPr>
-        <p:txBody>
-          <a:bodyPr wrap="square" lIns="0" tIns="0" rIns="0" bIns="0" rtlCol="0" anchor="t"/>
-          <a:lstStyle/>
-          <a:p>
-            <a:pPr algn="l" indent="0" marL="0">
-              <a:spcAft>
-                <a:spcPts val="800"/>
-              </a:spcAft>
-              <a:buNone/>
-            </a:pPr>
-            <a:r>
-              <a:rPr lang="en-US" sz="4000" dirty="0">
-                <a:solidFill>
-                  <a:srgbClr val="111111"/>
-                </a:solidFill>
-                <a:latin typeface="Times New Roman" pitchFamily="34" charset="0"/>
-                <a:ea typeface="Times New Roman" pitchFamily="34" charset="-122"/>
-                <a:cs typeface="Times New Roman" pitchFamily="34" charset="-120"/>
-              </a:rPr>
-              <a:t>What is the difference between weather and climate?</a:t>
-            </a:r>
-            <a:endParaRPr lang="en-US" sz="4000" dirty="0"/>
+              <a:t>Illustration: an anemometer</a:t>
+            </a:r>
+            <a:endParaRPr lang="en-US" sz="1600" dirty="0"/>
           </a:p>
         </p:txBody>
       </p:sp>
@@ -13113,7 +13605,7 @@
                 <a:ea typeface="Calibri" pitchFamily="34" charset="-122"/>
                 <a:cs typeface="Calibri" pitchFamily="34" charset="-120"/>
               </a:rPr>
-              <a:t>FORMATIVE EVALUATION</a:t>
+              <a:t>BOARD SUMMARY</a:t>
             </a:r>
             <a:endParaRPr lang="en-US" sz="1400" dirty="0"/>
           </a:p>
@@ -13178,7 +13670,7 @@
                 <a:ea typeface="Times New Roman" pitchFamily="34" charset="-122"/>
                 <a:cs typeface="Times New Roman" pitchFamily="34" charset="-120"/>
               </a:rPr>
-              <a:t>Expected Answer</a:t>
+              <a:t>1. Weather Elements, Instruments and Measurements</a:t>
             </a:r>
             <a:endParaRPr lang="en-US" sz="3600" dirty="0"/>
           </a:p>
@@ -13212,7 +13704,7 @@
               <a:buNone/>
             </a:pPr>
             <a:r>
-              <a:rPr lang="en-US" sz="4000" dirty="0">
+              <a:rPr lang="en-US" sz="4000" b="1" dirty="0">
                 <a:solidFill>
                   <a:srgbClr val="111111"/>
                 </a:solidFill>
@@ -13220,7 +13712,24 @@
                 <a:ea typeface="Times New Roman" pitchFamily="34" charset="-122"/>
                 <a:cs typeface="Times New Roman" pitchFamily="34" charset="-120"/>
               </a:rPr>
-              <a:t>Weather is today; climate is the average over about 30 years.</a:t>
+              <a:t>Sunshine: </a:t>
+            </a:r>
+            <a:pPr algn="l" indent="0" marL="0">
+              <a:spcAft>
+                <a:spcPts val="800"/>
+              </a:spcAft>
+              <a:buNone/>
+            </a:pPr>
+            <a:r>
+              <a:rPr lang="en-US" sz="4000" dirty="0">
+                <a:solidFill>
+                  <a:srgbClr val="111111"/>
+                </a:solidFill>
+                <a:latin typeface="Times New Roman" pitchFamily="34" charset="0"/>
+                <a:ea typeface="Times New Roman" pitchFamily="34" charset="-122"/>
+                <a:cs typeface="Times New Roman" pitchFamily="34" charset="-120"/>
+              </a:rPr>
+              <a:t>It is measured with a sunshine recorder, in hours per day.</a:t>
             </a:r>
             <a:endParaRPr lang="en-US" sz="4000" dirty="0"/>
           </a:p>
@@ -13332,7 +13841,7 @@
                 <a:ea typeface="Calibri" pitchFamily="34" charset="-122"/>
                 <a:cs typeface="Calibri" pitchFamily="34" charset="-120"/>
               </a:rPr>
-              <a:t>FORMATIVE EVALUATION</a:t>
+              <a:t>BOARD SUMMARY</a:t>
             </a:r>
             <a:endParaRPr lang="en-US" sz="1400" dirty="0"/>
           </a:p>
@@ -13397,7 +13906,7 @@
                 <a:ea typeface="Times New Roman" pitchFamily="34" charset="-122"/>
                 <a:cs typeface="Times New Roman" pitchFamily="34" charset="-120"/>
               </a:rPr>
-              <a:t>Evaluation 2</a:t>
+              <a:t>2. Isolines of the Weather Elements</a:t>
             </a:r>
             <a:endParaRPr lang="en-US" sz="3600" dirty="0"/>
           </a:p>
@@ -13431,7 +13940,7 @@
               <a:buNone/>
             </a:pPr>
             <a:r>
-              <a:rPr lang="en-US" sz="4000" dirty="0">
+              <a:rPr lang="en-US" sz="4000" i="1" dirty="0">
                 <a:solidFill>
                   <a:srgbClr val="111111"/>
                 </a:solidFill>
@@ -13439,7 +13948,81 @@
                 <a:ea typeface="Times New Roman" pitchFamily="34" charset="-122"/>
                 <a:cs typeface="Times New Roman" pitchFamily="34" charset="-120"/>
               </a:rPr>
-              <a:t>Which instrument measures rainfall?</a:t>
+              <a:t>Weather elements are shown on maps by the following isolines:</a:t>
+            </a:r>
+            <a:endParaRPr lang="en-US" sz="4000" dirty="0"/>
+          </a:p>
+          <a:p>
+            <a:pPr algn="l" indent="0" marL="0">
+              <a:spcAft>
+                <a:spcPts val="800"/>
+              </a:spcAft>
+              <a:buNone/>
+            </a:pPr>
+            <a:r>
+              <a:rPr lang="en-US" sz="4000" b="1" dirty="0">
+                <a:solidFill>
+                  <a:srgbClr val="111111"/>
+                </a:solidFill>
+                <a:latin typeface="Times New Roman" pitchFamily="34" charset="0"/>
+                <a:ea typeface="Times New Roman" pitchFamily="34" charset="-122"/>
+                <a:cs typeface="Times New Roman" pitchFamily="34" charset="-120"/>
+              </a:rPr>
+              <a:t>Isotherms: </a:t>
+            </a:r>
+            <a:pPr algn="l" indent="0" marL="0">
+              <a:spcAft>
+                <a:spcPts val="800"/>
+              </a:spcAft>
+              <a:buNone/>
+            </a:pPr>
+            <a:r>
+              <a:rPr lang="en-US" sz="4000" dirty="0">
+                <a:solidFill>
+                  <a:srgbClr val="111111"/>
+                </a:solidFill>
+                <a:latin typeface="Times New Roman" pitchFamily="34" charset="0"/>
+                <a:ea typeface="Times New Roman" pitchFamily="34" charset="-122"/>
+                <a:cs typeface="Times New Roman" pitchFamily="34" charset="-120"/>
+              </a:rPr>
+              <a:t>They join places with the same temperature.</a:t>
+            </a:r>
+            <a:endParaRPr lang="en-US" sz="4000" dirty="0"/>
+          </a:p>
+          <a:p>
+            <a:pPr algn="l" indent="0" marL="0">
+              <a:spcAft>
+                <a:spcPts val="800"/>
+              </a:spcAft>
+              <a:buNone/>
+            </a:pPr>
+            <a:r>
+              <a:rPr lang="en-US" sz="4000" b="1" dirty="0">
+                <a:solidFill>
+                  <a:srgbClr val="111111"/>
+                </a:solidFill>
+                <a:latin typeface="Times New Roman" pitchFamily="34" charset="0"/>
+                <a:ea typeface="Times New Roman" pitchFamily="34" charset="-122"/>
+                <a:cs typeface="Times New Roman" pitchFamily="34" charset="-120"/>
+              </a:rPr>
+              <a:t>Isohyets: </a:t>
+            </a:r>
+            <a:pPr algn="l" indent="0" marL="0">
+              <a:spcAft>
+                <a:spcPts val="800"/>
+              </a:spcAft>
+              <a:buNone/>
+            </a:pPr>
+            <a:r>
+              <a:rPr lang="en-US" sz="4000" dirty="0">
+                <a:solidFill>
+                  <a:srgbClr val="111111"/>
+                </a:solidFill>
+                <a:latin typeface="Times New Roman" pitchFamily="34" charset="0"/>
+                <a:ea typeface="Times New Roman" pitchFamily="34" charset="-122"/>
+                <a:cs typeface="Times New Roman" pitchFamily="34" charset="-120"/>
+              </a:rPr>
+              <a:t>They join places with the same rainfall.</a:t>
             </a:r>
             <a:endParaRPr lang="en-US" sz="4000" dirty="0"/>
           </a:p>
@@ -13551,7 +14134,7 @@
                 <a:ea typeface="Calibri" pitchFamily="34" charset="-122"/>
                 <a:cs typeface="Calibri" pitchFamily="34" charset="-120"/>
               </a:rPr>
-              <a:t>FORMATIVE EVALUATION</a:t>
+              <a:t>BOARD SUMMARY</a:t>
             </a:r>
             <a:endParaRPr lang="en-US" sz="1400" dirty="0"/>
           </a:p>
@@ -13616,7 +14199,7 @@
                 <a:ea typeface="Times New Roman" pitchFamily="34" charset="-122"/>
                 <a:cs typeface="Times New Roman" pitchFamily="34" charset="-120"/>
               </a:rPr>
-              <a:t>Expected Answer</a:t>
+              <a:t>2. Isolines of the Weather Elements (continued)</a:t>
             </a:r>
             <a:endParaRPr lang="en-US" sz="3600" dirty="0"/>
           </a:p>
@@ -13650,7 +14233,7 @@
               <a:buNone/>
             </a:pPr>
             <a:r>
-              <a:rPr lang="en-US" sz="4000" dirty="0">
+              <a:rPr lang="en-US" sz="4000" b="1" dirty="0">
                 <a:solidFill>
                   <a:srgbClr val="111111"/>
                 </a:solidFill>
@@ -13658,7 +14241,61 @@
                 <a:ea typeface="Times New Roman" pitchFamily="34" charset="-122"/>
                 <a:cs typeface="Times New Roman" pitchFamily="34" charset="-120"/>
               </a:rPr>
-              <a:t>The rain gauge.</a:t>
+              <a:t>Isobars: </a:t>
+            </a:r>
+            <a:pPr algn="l" indent="0" marL="0">
+              <a:spcAft>
+                <a:spcPts val="800"/>
+              </a:spcAft>
+              <a:buNone/>
+            </a:pPr>
+            <a:r>
+              <a:rPr lang="en-US" sz="4000" dirty="0">
+                <a:solidFill>
+                  <a:srgbClr val="111111"/>
+                </a:solidFill>
+                <a:latin typeface="Times New Roman" pitchFamily="34" charset="0"/>
+                <a:ea typeface="Times New Roman" pitchFamily="34" charset="-122"/>
+                <a:cs typeface="Times New Roman" pitchFamily="34" charset="-120"/>
+              </a:rPr>
+              <a:t>They join places with the same air pressure.</a:t>
+            </a:r>
+            <a:endParaRPr lang="en-US" sz="4000" dirty="0"/>
+          </a:p>
+          <a:p>
+            <a:pPr algn="l" indent="0" marL="0">
+              <a:spcAft>
+                <a:spcPts val="800"/>
+              </a:spcAft>
+              <a:buNone/>
+            </a:pPr>
+            <a:r>
+              <a:rPr lang="en-US" sz="4000" b="1" dirty="0">
+                <a:solidFill>
+                  <a:srgbClr val="111111"/>
+                </a:solidFill>
+                <a:latin typeface="Times New Roman" pitchFamily="34" charset="0"/>
+                <a:ea typeface="Times New Roman" pitchFamily="34" charset="-122"/>
+                <a:cs typeface="Times New Roman" pitchFamily="34" charset="-120"/>
+              </a:rPr>
+              <a:t>Isohels: </a:t>
+            </a:r>
+            <a:pPr algn="l" indent="0" marL="0">
+              <a:spcAft>
+                <a:spcPts val="800"/>
+              </a:spcAft>
+              <a:buNone/>
+            </a:pPr>
+            <a:r>
+              <a:rPr lang="en-US" sz="4000" dirty="0">
+                <a:solidFill>
+                  <a:srgbClr val="111111"/>
+                </a:solidFill>
+                <a:latin typeface="Times New Roman" pitchFamily="34" charset="0"/>
+                <a:ea typeface="Times New Roman" pitchFamily="34" charset="-122"/>
+                <a:cs typeface="Times New Roman" pitchFamily="34" charset="-120"/>
+              </a:rPr>
+              <a:t>They join places with the same amount of sunshine.</a:t>
             </a:r>
             <a:endParaRPr lang="en-US" sz="4000" dirty="0"/>
           </a:p>
@@ -13770,7 +14407,7 @@
                 <a:ea typeface="Calibri" pitchFamily="34" charset="-122"/>
                 <a:cs typeface="Calibri" pitchFamily="34" charset="-120"/>
               </a:rPr>
-              <a:t>REMEDIATION</a:t>
+              <a:t>FORMATIVE EVALUATION</a:t>
             </a:r>
             <a:endParaRPr lang="en-US" sz="1400" dirty="0"/>
           </a:p>
@@ -13793,7 +14430,7 @@
         <p:spPr>
           <a:xfrm>
             <a:off x="0" y="658368"/>
-            <a:ext cx="2468880" cy="5833872"/>
+            <a:ext cx="5120640" cy="5833872"/>
           </a:xfrm>
           <a:prstGeom prst="rect">
             <a:avLst/>
@@ -13808,8 +14445,8 @@
         </p:nvSpPr>
         <p:spPr>
           <a:xfrm>
-            <a:off x="2697480" y="1005840"/>
-            <a:ext cx="9174175" cy="731520"/>
+            <a:off x="5349240" y="1005840"/>
+            <a:ext cx="6522415" cy="731520"/>
           </a:xfrm>
           <a:prstGeom prst="rect">
             <a:avLst/>
@@ -13835,7 +14472,7 @@
                 <a:ea typeface="Times New Roman" pitchFamily="34" charset="-122"/>
                 <a:cs typeface="Times New Roman" pitchFamily="34" charset="-120"/>
               </a:rPr>
-              <a:t>Remediation</a:t>
+              <a:t>Evaluation 1</a:t>
             </a:r>
             <a:endParaRPr lang="en-US" sz="3600" dirty="0"/>
           </a:p>
@@ -13849,8 +14486,8 @@
         </p:nvSpPr>
         <p:spPr>
           <a:xfrm>
-            <a:off x="2697480" y="1783080"/>
-            <a:ext cx="9174175" cy="4663440"/>
+            <a:off x="5349240" y="1783080"/>
+            <a:ext cx="6522415" cy="4663440"/>
           </a:xfrm>
           <a:prstGeom prst="rect">
             <a:avLst/>
@@ -13869,7 +14506,7 @@
               <a:buNone/>
             </a:pPr>
             <a:r>
-              <a:rPr lang="en-US" sz="4000" b="1" dirty="0">
+              <a:rPr lang="en-US" sz="4000" dirty="0">
                 <a:solidFill>
                   <a:srgbClr val="111111"/>
                 </a:solidFill>
@@ -13877,73 +14514,7 @@
                 <a:ea typeface="Times New Roman" pitchFamily="34" charset="-122"/>
                 <a:cs typeface="Times New Roman" pitchFamily="34" charset="-120"/>
               </a:rPr>
-              <a:t>Fill in the blanks:</a:t>
-            </a:r>
-            <a:endParaRPr lang="en-US" sz="4000" dirty="0"/>
-          </a:p>
-          <a:p>
-            <a:pPr algn="l" marL="342900" indent="-342900">
-              <a:spcAft>
-                <a:spcPts val="800"/>
-              </a:spcAft>
-              <a:buSzPct val="100000"/>
-              <a:buFont typeface="+mj-lt"/>
-              <a:buAutoNum type="arabicPeriod" startAt="1"/>
-            </a:pPr>
-            <a:r>
-              <a:rPr lang="en-US" sz="4000" dirty="0">
-                <a:solidFill>
-                  <a:srgbClr val="111111"/>
-                </a:solidFill>
-                <a:latin typeface="Times New Roman" pitchFamily="34" charset="0"/>
-                <a:ea typeface="Times New Roman" pitchFamily="34" charset="-122"/>
-                <a:cs typeface="Times New Roman" pitchFamily="34" charset="-120"/>
-              </a:rPr>
-              <a:t>The condition of the air today is the ______.</a:t>
-            </a:r>
-            <a:endParaRPr lang="en-US" sz="4000" dirty="0"/>
-          </a:p>
-          <a:p>
-            <a:pPr algn="l" marL="342900" indent="-342900">
-              <a:spcAft>
-                <a:spcPts val="800"/>
-              </a:spcAft>
-              <a:buSzPct val="100000"/>
-              <a:buFont typeface="+mj-lt"/>
-              <a:buAutoNum type="arabicPeriod" startAt="1"/>
-            </a:pPr>
-            <a:r>
-              <a:rPr lang="en-US" sz="4000" dirty="0">
-                <a:solidFill>
-                  <a:srgbClr val="111111"/>
-                </a:solidFill>
-                <a:latin typeface="Times New Roman" pitchFamily="34" charset="0"/>
-                <a:ea typeface="Times New Roman" pitchFamily="34" charset="-122"/>
-                <a:cs typeface="Times New Roman" pitchFamily="34" charset="-120"/>
-              </a:rPr>
-              <a:t>The average weather over 30 years is the ______.</a:t>
-            </a:r>
-            <a:endParaRPr lang="en-US" sz="4000" dirty="0"/>
-          </a:p>
-          <a:p>
-            <a:pPr algn="l" marL="342900" indent="-342900">
-              <a:spcAft>
-                <a:spcPts val="800"/>
-              </a:spcAft>
-              <a:buSzPct val="100000"/>
-              <a:buFont typeface="+mj-lt"/>
-              <a:buAutoNum type="arabicPeriod" startAt="1"/>
-            </a:pPr>
-            <a:r>
-              <a:rPr lang="en-US" sz="4000" dirty="0">
-                <a:solidFill>
-                  <a:srgbClr val="111111"/>
-                </a:solidFill>
-                <a:latin typeface="Times New Roman" pitchFamily="34" charset="0"/>
-                <a:ea typeface="Times New Roman" pitchFamily="34" charset="-122"/>
-                <a:cs typeface="Times New Roman" pitchFamily="34" charset="-120"/>
-              </a:rPr>
-              <a:t>Wind speed is measured with an ______.</a:t>
+              <a:t>What is the difference between weather and climate?</a:t>
             </a:r>
             <a:endParaRPr lang="en-US" sz="4000" dirty="0"/>
           </a:p>
@@ -14055,7 +14626,7 @@
                 <a:ea typeface="Calibri" pitchFamily="34" charset="-122"/>
                 <a:cs typeface="Calibri" pitchFamily="34" charset="-120"/>
               </a:rPr>
-              <a:t>HOMEWORK</a:t>
+              <a:t>FORMATIVE EVALUATION</a:t>
             </a:r>
             <a:endParaRPr lang="en-US" sz="1400" dirty="0"/>
           </a:p>
@@ -14120,7 +14691,7 @@
                 <a:ea typeface="Times New Roman" pitchFamily="34" charset="-122"/>
                 <a:cs typeface="Times New Roman" pitchFamily="34" charset="-120"/>
               </a:rPr>
-              <a:t>Homework</a:t>
+              <a:t>Expected Answer</a:t>
             </a:r>
             <a:endParaRPr lang="en-US" sz="3600" dirty="0"/>
           </a:p>
@@ -14162,7 +14733,7 @@
                 <a:ea typeface="Times New Roman" pitchFamily="34" charset="-122"/>
                 <a:cs typeface="Times New Roman" pitchFamily="34" charset="-120"/>
               </a:rPr>
-              <a:t>Put one bottle of water in the sun and another in the shade for one hour. Touch both and write down which is hotter and why.</a:t>
+              <a:t>Weather is today; climate is the average over about 30 years.</a:t>
             </a:r>
             <a:endParaRPr lang="en-US" sz="4000" dirty="0"/>
           </a:p>
@@ -14513,7 +15084,7 @@
                 <a:ea typeface="Calibri" pitchFamily="34" charset="-122"/>
                 <a:cs typeface="Calibri" pitchFamily="34" charset="-120"/>
               </a:rPr>
-              <a:t>NEXT LESSON</a:t>
+              <a:t>FORMATIVE EVALUATION</a:t>
             </a:r>
             <a:endParaRPr lang="en-US" sz="1400" dirty="0"/>
           </a:p>
@@ -14578,7 +15149,7 @@
                 <a:ea typeface="Times New Roman" pitchFamily="34" charset="-122"/>
                 <a:cs typeface="Times New Roman" pitchFamily="34" charset="-120"/>
               </a:rPr>
-              <a:t>Next Lesson</a:t>
+              <a:t>Evaluation 2</a:t>
             </a:r>
             <a:endParaRPr lang="en-US" sz="3600" dirty="0"/>
           </a:p>
@@ -14602,17 +15173,17 @@
           <a:ln/>
         </p:spPr>
         <p:txBody>
-          <a:bodyPr wrap="square" lIns="0" tIns="0" rIns="0" bIns="0" rtlCol="0" anchor="ctr"/>
-          <a:lstStyle/>
-          <a:p>
-            <a:pPr algn="ctr" indent="0" marL="0">
+          <a:bodyPr wrap="square" lIns="0" tIns="0" rIns="0" bIns="0" rtlCol="0" anchor="t"/>
+          <a:lstStyle/>
+          <a:p>
+            <a:pPr algn="l" indent="0" marL="0">
               <a:spcAft>
                 <a:spcPts val="800"/>
               </a:spcAft>
               <a:buNone/>
             </a:pPr>
             <a:r>
-              <a:rPr lang="en-US" sz="4000" b="1" dirty="0">
+              <a:rPr lang="en-US" sz="4000" dirty="0">
                 <a:solidFill>
                   <a:srgbClr val="111111"/>
                 </a:solidFill>
@@ -14620,27 +15191,7 @@
                 <a:ea typeface="Times New Roman" pitchFamily="34" charset="-122"/>
                 <a:cs typeface="Times New Roman" pitchFamily="34" charset="-120"/>
               </a:rPr>
-              <a:t>Our next lesson will be on:</a:t>
-            </a:r>
-            <a:endParaRPr lang="en-US" sz="4000" dirty="0"/>
-          </a:p>
-          <a:p>
-            <a:pPr algn="ctr" indent="0" marL="0">
-              <a:spcAft>
-                <a:spcPts val="800"/>
-              </a:spcAft>
-              <a:buNone/>
-            </a:pPr>
-            <a:r>
-              <a:rPr lang="en-US" sz="4000" b="1" dirty="0">
-                <a:solidFill>
-                  <a:srgbClr val="990011"/>
-                </a:solidFill>
-                <a:latin typeface="Times New Roman" pitchFamily="34" charset="0"/>
-                <a:ea typeface="Times New Roman" pitchFamily="34" charset="-122"/>
-                <a:cs typeface="Times New Roman" pitchFamily="34" charset="-120"/>
-              </a:rPr>
-              <a:t>Lesson 32: Weather Elements: Atmospheric Temperatures</a:t>
+              <a:t>Which instrument measures rainfall?</a:t>
             </a:r>
             <a:endParaRPr lang="en-US" sz="4000" dirty="0"/>
           </a:p>
@@ -14752,6 +15303,968 @@
                 <a:ea typeface="Calibri" pitchFamily="34" charset="-122"/>
                 <a:cs typeface="Calibri" pitchFamily="34" charset="-120"/>
               </a:rPr>
+              <a:t>FORMATIVE EVALUATION</a:t>
+            </a:r>
+            <a:endParaRPr lang="en-US" sz="1400" dirty="0"/>
+          </a:p>
+        </p:txBody>
+      </p:sp>
+      <p:pic>
+        <p:nvPicPr>
+          <p:cNvPr id="3" name="Image 0" descr="/home/claude/f4/img/minesec_sheet.png">    </p:cNvPr>
+          <p:cNvPicPr>
+            <a:picLocks noChangeAspect="1"/>
+          </p:cNvPicPr>
+          <p:nvPr/>
+        </p:nvPicPr>
+        <p:blipFill>
+          <a:blip r:embed="rId1"/>
+          <a:stretch>
+            <a:fillRect/>
+          </a:stretch>
+        </p:blipFill>
+        <p:spPr>
+          <a:xfrm>
+            <a:off x="0" y="658368"/>
+            <a:ext cx="5120640" cy="5833872"/>
+          </a:xfrm>
+          <a:prstGeom prst="rect">
+            <a:avLst/>
+          </a:prstGeom>
+        </p:spPr>
+      </p:pic>
+      <p:sp>
+        <p:nvSpPr>
+          <p:cNvPr id="4" name="Text 1"/>
+          <p:cNvSpPr/>
+          <p:nvPr/>
+        </p:nvSpPr>
+        <p:spPr>
+          <a:xfrm>
+            <a:off x="5349240" y="1005840"/>
+            <a:ext cx="6522415" cy="731520"/>
+          </a:xfrm>
+          <a:prstGeom prst="rect">
+            <a:avLst/>
+          </a:prstGeom>
+          <a:noFill/>
+          <a:ln/>
+        </p:spPr>
+        <p:txBody>
+          <a:bodyPr wrap="square" lIns="0" tIns="0" rIns="0" bIns="0" rtlCol="0" anchor="ctr">
+            <a:normAutofit/>
+          </a:bodyPr>
+          <a:lstStyle/>
+          <a:p>
+            <a:pPr algn="ctr" indent="0" marL="0">
+              <a:buNone/>
+            </a:pPr>
+            <a:r>
+              <a:rPr lang="en-US" sz="3600" b="1" dirty="0">
+                <a:solidFill>
+                  <a:srgbClr val="990011"/>
+                </a:solidFill>
+                <a:latin typeface="Times New Roman" pitchFamily="34" charset="0"/>
+                <a:ea typeface="Times New Roman" pitchFamily="34" charset="-122"/>
+                <a:cs typeface="Times New Roman" pitchFamily="34" charset="-120"/>
+              </a:rPr>
+              <a:t>Expected Answer</a:t>
+            </a:r>
+            <a:endParaRPr lang="en-US" sz="3600" dirty="0"/>
+          </a:p>
+        </p:txBody>
+      </p:sp>
+      <p:sp>
+        <p:nvSpPr>
+          <p:cNvPr id="5" name="Text 2"/>
+          <p:cNvSpPr/>
+          <p:nvPr/>
+        </p:nvSpPr>
+        <p:spPr>
+          <a:xfrm>
+            <a:off x="5349240" y="1783080"/>
+            <a:ext cx="6522415" cy="4663440"/>
+          </a:xfrm>
+          <a:prstGeom prst="rect">
+            <a:avLst/>
+          </a:prstGeom>
+          <a:noFill/>
+          <a:ln/>
+        </p:spPr>
+        <p:txBody>
+          <a:bodyPr wrap="square" lIns="0" tIns="0" rIns="0" bIns="0" rtlCol="0" anchor="t"/>
+          <a:lstStyle/>
+          <a:p>
+            <a:pPr algn="l" indent="0" marL="0">
+              <a:spcAft>
+                <a:spcPts val="800"/>
+              </a:spcAft>
+              <a:buNone/>
+            </a:pPr>
+            <a:r>
+              <a:rPr lang="en-US" sz="4000" dirty="0">
+                <a:solidFill>
+                  <a:srgbClr val="111111"/>
+                </a:solidFill>
+                <a:latin typeface="Times New Roman" pitchFamily="34" charset="0"/>
+                <a:ea typeface="Times New Roman" pitchFamily="34" charset="-122"/>
+                <a:cs typeface="Times New Roman" pitchFamily="34" charset="-120"/>
+              </a:rPr>
+              <a:t>The rain gauge.</a:t>
+            </a:r>
+            <a:endParaRPr lang="en-US" sz="4000" dirty="0"/>
+          </a:p>
+        </p:txBody>
+      </p:sp>
+      <p:sp>
+        <p:nvSpPr>
+          <p:cNvPr id="25" name="Slide Number Placeholder 0"/>
+          <p:cNvSpPr>
+            <a:spLocks noGrp="1"/>
+          </p:cNvSpPr>
+          <p:nvPr>
+            <p:ph type="sldNum" sz="quarter" idx="4294967295"/>
+          </p:nvPr>
+        </p:nvSpPr>
+        <p:spPr>
+          <a:xfrm>
+            <a:off x="27432" y="91440"/>
+            <a:ext cx="585216" cy="475488"/>
+          </a:xfrm>
+          <a:prstGeom prst="rect">
+            <a:avLst/>
+          </a:prstGeom>
+          <a:extLst>
+            <a:ext uri="{C572A759-6A51-4108-AA02-DFA0A04FC94B}">
+              <ma14:wrappingTextBoxFlag xmlns:ma14="http://schemas.microsoft.com/office/mac/drawingml/2011/main" val="0"/>
+            </a:ext>
+          </a:extLst>
+        </p:spPr>
+        <p:txBody>
+          <a:bodyPr/>
+          <a:lstStyle>
+            <a:lvl1pPr>
+              <a:defRPr sz="2000">
+                <a:solidFill>
+                  <a:srgbClr val="FFFFFF"/>
+                </a:solidFill>
+                <a:latin typeface="Calibri"/>
+                <a:ea typeface="Calibri"/>
+                <a:cs typeface="Calibri"/>
+              </a:defRPr>
+            </a:lvl1pPr>
+          </a:lstStyle>
+          <a:p>
+            <a:pPr algn="ctr"/>
+            <a:fld id="{F7021451-1387-4CA6-816F-3879F97B5CBC}" type="slidenum">
+              <a:rPr b="1" lang="en-US"/>
+              <a:t>41</a:t>
+            </a:fld>
+            <a:endParaRPr lang="en-US"/>
+          </a:p>
+        </p:txBody>
+      </p:sp>
+    </p:spTree>
+  </p:cSld>
+  <p:clrMapOvr>
+    <a:masterClrMapping/>
+  </p:clrMapOvr>
+</p:sld>
+</file>
+
+<file path=ppt/slides/slide42.xml><?xml version="1.0" encoding="utf-8"?>
+<p:sld xmlns:a="http://schemas.openxmlformats.org/drawingml/2006/main" xmlns:r="http://schemas.openxmlformats.org/officeDocument/2006/relationships" xmlns:p="http://schemas.openxmlformats.org/presentationml/2006/main">
+  <p:cSld name="Slide 42">
+    <p:spTree>
+      <p:nvGrpSpPr>
+        <p:cNvPr id="1" name=""/>
+        <p:cNvGrpSpPr/>
+        <p:nvPr/>
+      </p:nvGrpSpPr>
+      <p:grpSpPr>
+        <a:xfrm>
+          <a:off x="0" y="0"/>
+          <a:ext cx="0" cy="0"/>
+          <a:chOff x="0" y="0"/>
+          <a:chExt cx="0" cy="0"/>
+        </a:xfrm>
+      </p:grpSpPr>
+      <p:sp>
+        <p:nvSpPr>
+          <p:cNvPr id="2" name="Text 0"/>
+          <p:cNvSpPr/>
+          <p:nvPr/>
+        </p:nvSpPr>
+        <p:spPr>
+          <a:xfrm>
+            <a:off x="457200" y="713232"/>
+            <a:ext cx="11368735" cy="274320"/>
+          </a:xfrm>
+          <a:prstGeom prst="rect">
+            <a:avLst/>
+          </a:prstGeom>
+          <a:noFill/>
+          <a:ln/>
+        </p:spPr>
+        <p:txBody>
+          <a:bodyPr wrap="square" lIns="0" tIns="0" rIns="0" bIns="0" rtlCol="0" anchor="ctr"/>
+          <a:lstStyle/>
+          <a:p>
+            <a:pPr algn="r" indent="0" marL="0">
+              <a:buNone/>
+            </a:pPr>
+            <a:r>
+              <a:rPr lang="en-US" sz="1400" b="1" dirty="0">
+                <a:solidFill>
+                  <a:srgbClr val="1C3F6E"/>
+                </a:solidFill>
+                <a:latin typeface="Calibri" pitchFamily="34" charset="0"/>
+                <a:ea typeface="Calibri" pitchFamily="34" charset="-122"/>
+                <a:cs typeface="Calibri" pitchFamily="34" charset="-120"/>
+              </a:rPr>
+              <a:t>REMEDIATION</a:t>
+            </a:r>
+            <a:endParaRPr lang="en-US" sz="1400" dirty="0"/>
+          </a:p>
+        </p:txBody>
+      </p:sp>
+      <p:pic>
+        <p:nvPicPr>
+          <p:cNvPr id="3" name="Image 0" descr="/home/claude/f4/img/minesec_sheet.png">    </p:cNvPr>
+          <p:cNvPicPr>
+            <a:picLocks noChangeAspect="1"/>
+          </p:cNvPicPr>
+          <p:nvPr/>
+        </p:nvPicPr>
+        <p:blipFill>
+          <a:blip r:embed="rId1"/>
+          <a:stretch>
+            <a:fillRect/>
+          </a:stretch>
+        </p:blipFill>
+        <p:spPr>
+          <a:xfrm>
+            <a:off x="0" y="658368"/>
+            <a:ext cx="2468880" cy="5833872"/>
+          </a:xfrm>
+          <a:prstGeom prst="rect">
+            <a:avLst/>
+          </a:prstGeom>
+        </p:spPr>
+      </p:pic>
+      <p:sp>
+        <p:nvSpPr>
+          <p:cNvPr id="4" name="Text 1"/>
+          <p:cNvSpPr/>
+          <p:nvPr/>
+        </p:nvSpPr>
+        <p:spPr>
+          <a:xfrm>
+            <a:off x="2697480" y="1005840"/>
+            <a:ext cx="9174175" cy="731520"/>
+          </a:xfrm>
+          <a:prstGeom prst="rect">
+            <a:avLst/>
+          </a:prstGeom>
+          <a:noFill/>
+          <a:ln/>
+        </p:spPr>
+        <p:txBody>
+          <a:bodyPr wrap="square" lIns="0" tIns="0" rIns="0" bIns="0" rtlCol="0" anchor="ctr">
+            <a:normAutofit/>
+          </a:bodyPr>
+          <a:lstStyle/>
+          <a:p>
+            <a:pPr algn="ctr" indent="0" marL="0">
+              <a:buNone/>
+            </a:pPr>
+            <a:r>
+              <a:rPr lang="en-US" sz="3600" b="1" dirty="0">
+                <a:solidFill>
+                  <a:srgbClr val="990011"/>
+                </a:solidFill>
+                <a:latin typeface="Times New Roman" pitchFamily="34" charset="0"/>
+                <a:ea typeface="Times New Roman" pitchFamily="34" charset="-122"/>
+                <a:cs typeface="Times New Roman" pitchFamily="34" charset="-120"/>
+              </a:rPr>
+              <a:t>Remediation</a:t>
+            </a:r>
+            <a:endParaRPr lang="en-US" sz="3600" dirty="0"/>
+          </a:p>
+        </p:txBody>
+      </p:sp>
+      <p:sp>
+        <p:nvSpPr>
+          <p:cNvPr id="5" name="Text 2"/>
+          <p:cNvSpPr/>
+          <p:nvPr/>
+        </p:nvSpPr>
+        <p:spPr>
+          <a:xfrm>
+            <a:off x="2697480" y="1783080"/>
+            <a:ext cx="9174175" cy="4663440"/>
+          </a:xfrm>
+          <a:prstGeom prst="rect">
+            <a:avLst/>
+          </a:prstGeom>
+          <a:noFill/>
+          <a:ln/>
+        </p:spPr>
+        <p:txBody>
+          <a:bodyPr wrap="square" lIns="0" tIns="0" rIns="0" bIns="0" rtlCol="0" anchor="t"/>
+          <a:lstStyle/>
+          <a:p>
+            <a:pPr algn="l" indent="0" marL="0">
+              <a:spcAft>
+                <a:spcPts val="800"/>
+              </a:spcAft>
+              <a:buNone/>
+            </a:pPr>
+            <a:r>
+              <a:rPr lang="en-US" sz="4000" b="1" dirty="0">
+                <a:solidFill>
+                  <a:srgbClr val="111111"/>
+                </a:solidFill>
+                <a:latin typeface="Times New Roman" pitchFamily="34" charset="0"/>
+                <a:ea typeface="Times New Roman" pitchFamily="34" charset="-122"/>
+                <a:cs typeface="Times New Roman" pitchFamily="34" charset="-120"/>
+              </a:rPr>
+              <a:t>Fill in the blanks:</a:t>
+            </a:r>
+            <a:endParaRPr lang="en-US" sz="4000" dirty="0"/>
+          </a:p>
+          <a:p>
+            <a:pPr algn="l" marL="342900" indent="-342900">
+              <a:spcAft>
+                <a:spcPts val="800"/>
+              </a:spcAft>
+              <a:buSzPct val="100000"/>
+              <a:buFont typeface="+mj-lt"/>
+              <a:buAutoNum type="arabicPeriod" startAt="1"/>
+            </a:pPr>
+            <a:r>
+              <a:rPr lang="en-US" sz="4000" dirty="0">
+                <a:solidFill>
+                  <a:srgbClr val="111111"/>
+                </a:solidFill>
+                <a:latin typeface="Times New Roman" pitchFamily="34" charset="0"/>
+                <a:ea typeface="Times New Roman" pitchFamily="34" charset="-122"/>
+                <a:cs typeface="Times New Roman" pitchFamily="34" charset="-120"/>
+              </a:rPr>
+              <a:t>The condition of the air today is the ______.</a:t>
+            </a:r>
+            <a:endParaRPr lang="en-US" sz="4000" dirty="0"/>
+          </a:p>
+          <a:p>
+            <a:pPr algn="l" marL="342900" indent="-342900">
+              <a:spcAft>
+                <a:spcPts val="800"/>
+              </a:spcAft>
+              <a:buSzPct val="100000"/>
+              <a:buFont typeface="+mj-lt"/>
+              <a:buAutoNum type="arabicPeriod" startAt="1"/>
+            </a:pPr>
+            <a:r>
+              <a:rPr lang="en-US" sz="4000" dirty="0">
+                <a:solidFill>
+                  <a:srgbClr val="111111"/>
+                </a:solidFill>
+                <a:latin typeface="Times New Roman" pitchFamily="34" charset="0"/>
+                <a:ea typeface="Times New Roman" pitchFamily="34" charset="-122"/>
+                <a:cs typeface="Times New Roman" pitchFamily="34" charset="-120"/>
+              </a:rPr>
+              <a:t>The average weather over 30 years is the ______.</a:t>
+            </a:r>
+            <a:endParaRPr lang="en-US" sz="4000" dirty="0"/>
+          </a:p>
+          <a:p>
+            <a:pPr algn="l" marL="342900" indent="-342900">
+              <a:spcAft>
+                <a:spcPts val="800"/>
+              </a:spcAft>
+              <a:buSzPct val="100000"/>
+              <a:buFont typeface="+mj-lt"/>
+              <a:buAutoNum type="arabicPeriod" startAt="1"/>
+            </a:pPr>
+            <a:r>
+              <a:rPr lang="en-US" sz="4000" dirty="0">
+                <a:solidFill>
+                  <a:srgbClr val="111111"/>
+                </a:solidFill>
+                <a:latin typeface="Times New Roman" pitchFamily="34" charset="0"/>
+                <a:ea typeface="Times New Roman" pitchFamily="34" charset="-122"/>
+                <a:cs typeface="Times New Roman" pitchFamily="34" charset="-120"/>
+              </a:rPr>
+              <a:t>Wind speed is measured with an ______.</a:t>
+            </a:r>
+            <a:endParaRPr lang="en-US" sz="4000" dirty="0"/>
+          </a:p>
+        </p:txBody>
+      </p:sp>
+      <p:sp>
+        <p:nvSpPr>
+          <p:cNvPr id="25" name="Slide Number Placeholder 0"/>
+          <p:cNvSpPr>
+            <a:spLocks noGrp="1"/>
+          </p:cNvSpPr>
+          <p:nvPr>
+            <p:ph type="sldNum" sz="quarter" idx="4294967295"/>
+          </p:nvPr>
+        </p:nvSpPr>
+        <p:spPr>
+          <a:xfrm>
+            <a:off x="27432" y="91440"/>
+            <a:ext cx="585216" cy="475488"/>
+          </a:xfrm>
+          <a:prstGeom prst="rect">
+            <a:avLst/>
+          </a:prstGeom>
+          <a:extLst>
+            <a:ext uri="{C572A759-6A51-4108-AA02-DFA0A04FC94B}">
+              <ma14:wrappingTextBoxFlag xmlns:ma14="http://schemas.microsoft.com/office/mac/drawingml/2011/main" val="0"/>
+            </a:ext>
+          </a:extLst>
+        </p:spPr>
+        <p:txBody>
+          <a:bodyPr/>
+          <a:lstStyle>
+            <a:lvl1pPr>
+              <a:defRPr sz="2000">
+                <a:solidFill>
+                  <a:srgbClr val="FFFFFF"/>
+                </a:solidFill>
+                <a:latin typeface="Calibri"/>
+                <a:ea typeface="Calibri"/>
+                <a:cs typeface="Calibri"/>
+              </a:defRPr>
+            </a:lvl1pPr>
+          </a:lstStyle>
+          <a:p>
+            <a:pPr algn="ctr"/>
+            <a:fld id="{F7021451-1387-4CA6-816F-3879F97B5CBC}" type="slidenum">
+              <a:rPr b="1" lang="en-US"/>
+              <a:t>42</a:t>
+            </a:fld>
+            <a:endParaRPr lang="en-US"/>
+          </a:p>
+        </p:txBody>
+      </p:sp>
+    </p:spTree>
+  </p:cSld>
+  <p:clrMapOvr>
+    <a:masterClrMapping/>
+  </p:clrMapOvr>
+</p:sld>
+</file>
+
+<file path=ppt/slides/slide43.xml><?xml version="1.0" encoding="utf-8"?>
+<p:sld xmlns:a="http://schemas.openxmlformats.org/drawingml/2006/main" xmlns:r="http://schemas.openxmlformats.org/officeDocument/2006/relationships" xmlns:p="http://schemas.openxmlformats.org/presentationml/2006/main">
+  <p:cSld name="Slide 43">
+    <p:spTree>
+      <p:nvGrpSpPr>
+        <p:cNvPr id="1" name=""/>
+        <p:cNvGrpSpPr/>
+        <p:nvPr/>
+      </p:nvGrpSpPr>
+      <p:grpSpPr>
+        <a:xfrm>
+          <a:off x="0" y="0"/>
+          <a:ext cx="0" cy="0"/>
+          <a:chOff x="0" y="0"/>
+          <a:chExt cx="0" cy="0"/>
+        </a:xfrm>
+      </p:grpSpPr>
+      <p:sp>
+        <p:nvSpPr>
+          <p:cNvPr id="2" name="Text 0"/>
+          <p:cNvSpPr/>
+          <p:nvPr/>
+        </p:nvSpPr>
+        <p:spPr>
+          <a:xfrm>
+            <a:off x="457200" y="713232"/>
+            <a:ext cx="11368735" cy="274320"/>
+          </a:xfrm>
+          <a:prstGeom prst="rect">
+            <a:avLst/>
+          </a:prstGeom>
+          <a:noFill/>
+          <a:ln/>
+        </p:spPr>
+        <p:txBody>
+          <a:bodyPr wrap="square" lIns="0" tIns="0" rIns="0" bIns="0" rtlCol="0" anchor="ctr"/>
+          <a:lstStyle/>
+          <a:p>
+            <a:pPr algn="r" indent="0" marL="0">
+              <a:buNone/>
+            </a:pPr>
+            <a:r>
+              <a:rPr lang="en-US" sz="1400" b="1" dirty="0">
+                <a:solidFill>
+                  <a:srgbClr val="1C3F6E"/>
+                </a:solidFill>
+                <a:latin typeface="Calibri" pitchFamily="34" charset="0"/>
+                <a:ea typeface="Calibri" pitchFamily="34" charset="-122"/>
+                <a:cs typeface="Calibri" pitchFamily="34" charset="-120"/>
+              </a:rPr>
+              <a:t>HOMEWORK</a:t>
+            </a:r>
+            <a:endParaRPr lang="en-US" sz="1400" dirty="0"/>
+          </a:p>
+        </p:txBody>
+      </p:sp>
+      <p:pic>
+        <p:nvPicPr>
+          <p:cNvPr id="3" name="Image 0" descr="/home/claude/f4/img/minesec_sheet.png">    </p:cNvPr>
+          <p:cNvPicPr>
+            <a:picLocks noChangeAspect="1"/>
+          </p:cNvPicPr>
+          <p:nvPr/>
+        </p:nvPicPr>
+        <p:blipFill>
+          <a:blip r:embed="rId1"/>
+          <a:stretch>
+            <a:fillRect/>
+          </a:stretch>
+        </p:blipFill>
+        <p:spPr>
+          <a:xfrm>
+            <a:off x="0" y="658368"/>
+            <a:ext cx="5120640" cy="5833872"/>
+          </a:xfrm>
+          <a:prstGeom prst="rect">
+            <a:avLst/>
+          </a:prstGeom>
+        </p:spPr>
+      </p:pic>
+      <p:sp>
+        <p:nvSpPr>
+          <p:cNvPr id="4" name="Text 1"/>
+          <p:cNvSpPr/>
+          <p:nvPr/>
+        </p:nvSpPr>
+        <p:spPr>
+          <a:xfrm>
+            <a:off x="5349240" y="1005840"/>
+            <a:ext cx="6522415" cy="731520"/>
+          </a:xfrm>
+          <a:prstGeom prst="rect">
+            <a:avLst/>
+          </a:prstGeom>
+          <a:noFill/>
+          <a:ln/>
+        </p:spPr>
+        <p:txBody>
+          <a:bodyPr wrap="square" lIns="0" tIns="0" rIns="0" bIns="0" rtlCol="0" anchor="ctr">
+            <a:normAutofit/>
+          </a:bodyPr>
+          <a:lstStyle/>
+          <a:p>
+            <a:pPr algn="ctr" indent="0" marL="0">
+              <a:buNone/>
+            </a:pPr>
+            <a:r>
+              <a:rPr lang="en-US" sz="3600" b="1" dirty="0">
+                <a:solidFill>
+                  <a:srgbClr val="990011"/>
+                </a:solidFill>
+                <a:latin typeface="Times New Roman" pitchFamily="34" charset="0"/>
+                <a:ea typeface="Times New Roman" pitchFamily="34" charset="-122"/>
+                <a:cs typeface="Times New Roman" pitchFamily="34" charset="-120"/>
+              </a:rPr>
+              <a:t>Homework</a:t>
+            </a:r>
+            <a:endParaRPr lang="en-US" sz="3600" dirty="0"/>
+          </a:p>
+        </p:txBody>
+      </p:sp>
+      <p:sp>
+        <p:nvSpPr>
+          <p:cNvPr id="5" name="Text 2"/>
+          <p:cNvSpPr/>
+          <p:nvPr/>
+        </p:nvSpPr>
+        <p:spPr>
+          <a:xfrm>
+            <a:off x="5349240" y="1783080"/>
+            <a:ext cx="6522415" cy="4663440"/>
+          </a:xfrm>
+          <a:prstGeom prst="rect">
+            <a:avLst/>
+          </a:prstGeom>
+          <a:noFill/>
+          <a:ln/>
+        </p:spPr>
+        <p:txBody>
+          <a:bodyPr wrap="square" lIns="0" tIns="0" rIns="0" bIns="0" rtlCol="0" anchor="t"/>
+          <a:lstStyle/>
+          <a:p>
+            <a:pPr algn="l" indent="0" marL="0">
+              <a:spcAft>
+                <a:spcPts val="800"/>
+              </a:spcAft>
+              <a:buNone/>
+            </a:pPr>
+            <a:r>
+              <a:rPr lang="en-US" sz="4000" dirty="0">
+                <a:solidFill>
+                  <a:srgbClr val="111111"/>
+                </a:solidFill>
+                <a:latin typeface="Times New Roman" pitchFamily="34" charset="0"/>
+                <a:ea typeface="Times New Roman" pitchFamily="34" charset="-122"/>
+                <a:cs typeface="Times New Roman" pitchFamily="34" charset="-120"/>
+              </a:rPr>
+              <a:t>Put one bottle of water in the sun and another in the shade for one hour. Touch both and write down which is hotter and why.</a:t>
+            </a:r>
+            <a:endParaRPr lang="en-US" sz="4000" dirty="0"/>
+          </a:p>
+        </p:txBody>
+      </p:sp>
+      <p:sp>
+        <p:nvSpPr>
+          <p:cNvPr id="25" name="Slide Number Placeholder 0"/>
+          <p:cNvSpPr>
+            <a:spLocks noGrp="1"/>
+          </p:cNvSpPr>
+          <p:nvPr>
+            <p:ph type="sldNum" sz="quarter" idx="4294967295"/>
+          </p:nvPr>
+        </p:nvSpPr>
+        <p:spPr>
+          <a:xfrm>
+            <a:off x="27432" y="91440"/>
+            <a:ext cx="585216" cy="475488"/>
+          </a:xfrm>
+          <a:prstGeom prst="rect">
+            <a:avLst/>
+          </a:prstGeom>
+          <a:extLst>
+            <a:ext uri="{C572A759-6A51-4108-AA02-DFA0A04FC94B}">
+              <ma14:wrappingTextBoxFlag xmlns:ma14="http://schemas.microsoft.com/office/mac/drawingml/2011/main" val="0"/>
+            </a:ext>
+          </a:extLst>
+        </p:spPr>
+        <p:txBody>
+          <a:bodyPr/>
+          <a:lstStyle>
+            <a:lvl1pPr>
+              <a:defRPr sz="2000">
+                <a:solidFill>
+                  <a:srgbClr val="FFFFFF"/>
+                </a:solidFill>
+                <a:latin typeface="Calibri"/>
+                <a:ea typeface="Calibri"/>
+                <a:cs typeface="Calibri"/>
+              </a:defRPr>
+            </a:lvl1pPr>
+          </a:lstStyle>
+          <a:p>
+            <a:pPr algn="ctr"/>
+            <a:fld id="{F7021451-1387-4CA6-816F-3879F97B5CBC}" type="slidenum">
+              <a:rPr b="1" lang="en-US"/>
+              <a:t>43</a:t>
+            </a:fld>
+            <a:endParaRPr lang="en-US"/>
+          </a:p>
+        </p:txBody>
+      </p:sp>
+    </p:spTree>
+  </p:cSld>
+  <p:clrMapOvr>
+    <a:masterClrMapping/>
+  </p:clrMapOvr>
+</p:sld>
+</file>
+
+<file path=ppt/slides/slide44.xml><?xml version="1.0" encoding="utf-8"?>
+<p:sld xmlns:a="http://schemas.openxmlformats.org/drawingml/2006/main" xmlns:r="http://schemas.openxmlformats.org/officeDocument/2006/relationships" xmlns:p="http://schemas.openxmlformats.org/presentationml/2006/main">
+  <p:cSld name="Slide 44">
+    <p:spTree>
+      <p:nvGrpSpPr>
+        <p:cNvPr id="1" name=""/>
+        <p:cNvGrpSpPr/>
+        <p:nvPr/>
+      </p:nvGrpSpPr>
+      <p:grpSpPr>
+        <a:xfrm>
+          <a:off x="0" y="0"/>
+          <a:ext cx="0" cy="0"/>
+          <a:chOff x="0" y="0"/>
+          <a:chExt cx="0" cy="0"/>
+        </a:xfrm>
+      </p:grpSpPr>
+      <p:sp>
+        <p:nvSpPr>
+          <p:cNvPr id="2" name="Text 0"/>
+          <p:cNvSpPr/>
+          <p:nvPr/>
+        </p:nvSpPr>
+        <p:spPr>
+          <a:xfrm>
+            <a:off x="457200" y="713232"/>
+            <a:ext cx="11368735" cy="274320"/>
+          </a:xfrm>
+          <a:prstGeom prst="rect">
+            <a:avLst/>
+          </a:prstGeom>
+          <a:noFill/>
+          <a:ln/>
+        </p:spPr>
+        <p:txBody>
+          <a:bodyPr wrap="square" lIns="0" tIns="0" rIns="0" bIns="0" rtlCol="0" anchor="ctr"/>
+          <a:lstStyle/>
+          <a:p>
+            <a:pPr algn="r" indent="0" marL="0">
+              <a:buNone/>
+            </a:pPr>
+            <a:r>
+              <a:rPr lang="en-US" sz="1400" b="1" dirty="0">
+                <a:solidFill>
+                  <a:srgbClr val="1C3F6E"/>
+                </a:solidFill>
+                <a:latin typeface="Calibri" pitchFamily="34" charset="0"/>
+                <a:ea typeface="Calibri" pitchFamily="34" charset="-122"/>
+                <a:cs typeface="Calibri" pitchFamily="34" charset="-120"/>
+              </a:rPr>
+              <a:t>NEXT LESSON</a:t>
+            </a:r>
+            <a:endParaRPr lang="en-US" sz="1400" dirty="0"/>
+          </a:p>
+        </p:txBody>
+      </p:sp>
+      <p:pic>
+        <p:nvPicPr>
+          <p:cNvPr id="3" name="Image 0" descr="/home/claude/f4/img/minesec_sheet.png">    </p:cNvPr>
+          <p:cNvPicPr>
+            <a:picLocks noChangeAspect="1"/>
+          </p:cNvPicPr>
+          <p:nvPr/>
+        </p:nvPicPr>
+        <p:blipFill>
+          <a:blip r:embed="rId1"/>
+          <a:stretch>
+            <a:fillRect/>
+          </a:stretch>
+        </p:blipFill>
+        <p:spPr>
+          <a:xfrm>
+            <a:off x="0" y="658368"/>
+            <a:ext cx="5120640" cy="5833872"/>
+          </a:xfrm>
+          <a:prstGeom prst="rect">
+            <a:avLst/>
+          </a:prstGeom>
+        </p:spPr>
+      </p:pic>
+      <p:sp>
+        <p:nvSpPr>
+          <p:cNvPr id="4" name="Text 1"/>
+          <p:cNvSpPr/>
+          <p:nvPr/>
+        </p:nvSpPr>
+        <p:spPr>
+          <a:xfrm>
+            <a:off x="5349240" y="1005840"/>
+            <a:ext cx="6522415" cy="731520"/>
+          </a:xfrm>
+          <a:prstGeom prst="rect">
+            <a:avLst/>
+          </a:prstGeom>
+          <a:noFill/>
+          <a:ln/>
+        </p:spPr>
+        <p:txBody>
+          <a:bodyPr wrap="square" lIns="0" tIns="0" rIns="0" bIns="0" rtlCol="0" anchor="ctr">
+            <a:normAutofit/>
+          </a:bodyPr>
+          <a:lstStyle/>
+          <a:p>
+            <a:pPr algn="ctr" indent="0" marL="0">
+              <a:buNone/>
+            </a:pPr>
+            <a:r>
+              <a:rPr lang="en-US" sz="3600" b="1" dirty="0">
+                <a:solidFill>
+                  <a:srgbClr val="990011"/>
+                </a:solidFill>
+                <a:latin typeface="Times New Roman" pitchFamily="34" charset="0"/>
+                <a:ea typeface="Times New Roman" pitchFamily="34" charset="-122"/>
+                <a:cs typeface="Times New Roman" pitchFamily="34" charset="-120"/>
+              </a:rPr>
+              <a:t>Next Lesson</a:t>
+            </a:r>
+            <a:endParaRPr lang="en-US" sz="3600" dirty="0"/>
+          </a:p>
+        </p:txBody>
+      </p:sp>
+      <p:sp>
+        <p:nvSpPr>
+          <p:cNvPr id="5" name="Text 2"/>
+          <p:cNvSpPr/>
+          <p:nvPr/>
+        </p:nvSpPr>
+        <p:spPr>
+          <a:xfrm>
+            <a:off x="5349240" y="1783080"/>
+            <a:ext cx="6522415" cy="4663440"/>
+          </a:xfrm>
+          <a:prstGeom prst="rect">
+            <a:avLst/>
+          </a:prstGeom>
+          <a:noFill/>
+          <a:ln/>
+        </p:spPr>
+        <p:txBody>
+          <a:bodyPr wrap="square" lIns="0" tIns="0" rIns="0" bIns="0" rtlCol="0" anchor="ctr"/>
+          <a:lstStyle/>
+          <a:p>
+            <a:pPr algn="ctr" indent="0" marL="0">
+              <a:spcAft>
+                <a:spcPts val="800"/>
+              </a:spcAft>
+              <a:buNone/>
+            </a:pPr>
+            <a:r>
+              <a:rPr lang="en-US" sz="4000" b="1" dirty="0">
+                <a:solidFill>
+                  <a:srgbClr val="111111"/>
+                </a:solidFill>
+                <a:latin typeface="Times New Roman" pitchFamily="34" charset="0"/>
+                <a:ea typeface="Times New Roman" pitchFamily="34" charset="-122"/>
+                <a:cs typeface="Times New Roman" pitchFamily="34" charset="-120"/>
+              </a:rPr>
+              <a:t>Our next lesson will be on:</a:t>
+            </a:r>
+            <a:endParaRPr lang="en-US" sz="4000" dirty="0"/>
+          </a:p>
+          <a:p>
+            <a:pPr algn="ctr" indent="0" marL="0">
+              <a:spcAft>
+                <a:spcPts val="800"/>
+              </a:spcAft>
+              <a:buNone/>
+            </a:pPr>
+            <a:r>
+              <a:rPr lang="en-US" sz="4000" b="1" dirty="0">
+                <a:solidFill>
+                  <a:srgbClr val="990011"/>
+                </a:solidFill>
+                <a:latin typeface="Times New Roman" pitchFamily="34" charset="0"/>
+                <a:ea typeface="Times New Roman" pitchFamily="34" charset="-122"/>
+                <a:cs typeface="Times New Roman" pitchFamily="34" charset="-120"/>
+              </a:rPr>
+              <a:t>Lesson 32: Weather Elements: Atmospheric Temperatures</a:t>
+            </a:r>
+            <a:endParaRPr lang="en-US" sz="4000" dirty="0"/>
+          </a:p>
+        </p:txBody>
+      </p:sp>
+      <p:sp>
+        <p:nvSpPr>
+          <p:cNvPr id="25" name="Slide Number Placeholder 0"/>
+          <p:cNvSpPr>
+            <a:spLocks noGrp="1"/>
+          </p:cNvSpPr>
+          <p:nvPr>
+            <p:ph type="sldNum" sz="quarter" idx="4294967295"/>
+          </p:nvPr>
+        </p:nvSpPr>
+        <p:spPr>
+          <a:xfrm>
+            <a:off x="27432" y="91440"/>
+            <a:ext cx="585216" cy="475488"/>
+          </a:xfrm>
+          <a:prstGeom prst="rect">
+            <a:avLst/>
+          </a:prstGeom>
+          <a:extLst>
+            <a:ext uri="{C572A759-6A51-4108-AA02-DFA0A04FC94B}">
+              <ma14:wrappingTextBoxFlag xmlns:ma14="http://schemas.microsoft.com/office/mac/drawingml/2011/main" val="0"/>
+            </a:ext>
+          </a:extLst>
+        </p:spPr>
+        <p:txBody>
+          <a:bodyPr/>
+          <a:lstStyle>
+            <a:lvl1pPr>
+              <a:defRPr sz="2000">
+                <a:solidFill>
+                  <a:srgbClr val="FFFFFF"/>
+                </a:solidFill>
+                <a:latin typeface="Calibri"/>
+                <a:ea typeface="Calibri"/>
+                <a:cs typeface="Calibri"/>
+              </a:defRPr>
+            </a:lvl1pPr>
+          </a:lstStyle>
+          <a:p>
+            <a:pPr algn="ctr"/>
+            <a:fld id="{F7021451-1387-4CA6-816F-3879F97B5CBC}" type="slidenum">
+              <a:rPr b="1" lang="en-US"/>
+              <a:t>44</a:t>
+            </a:fld>
+            <a:endParaRPr lang="en-US"/>
+          </a:p>
+        </p:txBody>
+      </p:sp>
+    </p:spTree>
+  </p:cSld>
+  <p:clrMapOvr>
+    <a:masterClrMapping/>
+  </p:clrMapOvr>
+</p:sld>
+</file>
+
+<file path=ppt/slides/slide45.xml><?xml version="1.0" encoding="utf-8"?>
+<p:sld xmlns:a="http://schemas.openxmlformats.org/drawingml/2006/main" xmlns:r="http://schemas.openxmlformats.org/officeDocument/2006/relationships" xmlns:p="http://schemas.openxmlformats.org/presentationml/2006/main">
+  <p:cSld name="Slide 45">
+    <p:spTree>
+      <p:nvGrpSpPr>
+        <p:cNvPr id="1" name=""/>
+        <p:cNvGrpSpPr/>
+        <p:nvPr/>
+      </p:nvGrpSpPr>
+      <p:grpSpPr>
+        <a:xfrm>
+          <a:off x="0" y="0"/>
+          <a:ext cx="0" cy="0"/>
+          <a:chOff x="0" y="0"/>
+          <a:chExt cx="0" cy="0"/>
+        </a:xfrm>
+      </p:grpSpPr>
+      <p:sp>
+        <p:nvSpPr>
+          <p:cNvPr id="2" name="Text 0"/>
+          <p:cNvSpPr/>
+          <p:nvPr/>
+        </p:nvSpPr>
+        <p:spPr>
+          <a:xfrm>
+            <a:off x="457200" y="713232"/>
+            <a:ext cx="11368735" cy="274320"/>
+          </a:xfrm>
+          <a:prstGeom prst="rect">
+            <a:avLst/>
+          </a:prstGeom>
+          <a:noFill/>
+          <a:ln/>
+        </p:spPr>
+        <p:txBody>
+          <a:bodyPr wrap="square" lIns="0" tIns="0" rIns="0" bIns="0" rtlCol="0" anchor="ctr"/>
+          <a:lstStyle/>
+          <a:p>
+            <a:pPr algn="r" indent="0" marL="0">
+              <a:buNone/>
+            </a:pPr>
+            <a:r>
+              <a:rPr lang="en-US" sz="1400" b="1" dirty="0">
+                <a:solidFill>
+                  <a:srgbClr val="1C3F6E"/>
+                </a:solidFill>
+                <a:latin typeface="Calibri" pitchFamily="34" charset="0"/>
+                <a:ea typeface="Calibri" pitchFamily="34" charset="-122"/>
+                <a:cs typeface="Calibri" pitchFamily="34" charset="-120"/>
+              </a:rPr>
               <a:t>BILINGUAL GAME</a:t>
             </a:r>
             <a:endParaRPr lang="en-US" sz="1400" dirty="0"/>
@@ -14799,7 +16312,7 @@
       </p:sp>
       <p:graphicFrame>
         <p:nvGraphicFramePr>
-          <p:cNvPr id="42" name="Table 0"/>
+          <p:cNvPr id="46" name="Table 0"/>
           <p:cNvGraphicFramePr>
             <a:graphicFrameLocks noGrp="1"/>
           </p:cNvGraphicFramePr>
@@ -16111,7 +17624,7 @@
             <a:pPr algn="ctr"/>
             <a:fld id="{F7021451-1387-4CA6-816F-3879F97B5CBC}" type="slidenum">
               <a:rPr b="1" lang="en-US"/>
-              <a:t>41</a:t>
+              <a:t>45</a:t>
             </a:fld>
             <a:endParaRPr lang="en-US"/>
           </a:p>
@@ -16125,9 +17638,9 @@
 </p:sld>
 </file>
 
-<file path=ppt/slides/slide42.xml><?xml version="1.0" encoding="utf-8"?>
+<file path=ppt/slides/slide46.xml><?xml version="1.0" encoding="utf-8"?>
 <p:sld xmlns:a="http://schemas.openxmlformats.org/drawingml/2006/main" xmlns:r="http://schemas.openxmlformats.org/officeDocument/2006/relationships" xmlns:p="http://schemas.openxmlformats.org/presentationml/2006/main">
-  <p:cSld name="Slide 42">
+  <p:cSld name="Slide 46">
     <p:spTree>
       <p:nvGrpSpPr>
         <p:cNvPr id="1" name=""/>
@@ -16222,7 +17735,7 @@
       </p:sp>
       <p:graphicFrame>
         <p:nvGraphicFramePr>
-          <p:cNvPr id="43" name="Table 0"/>
+          <p:cNvPr id="47" name="Table 0"/>
           <p:cNvGraphicFramePr>
             <a:graphicFrameLocks noGrp="1"/>
           </p:cNvGraphicFramePr>
@@ -16844,7 +18357,7 @@
             <a:pPr algn="ctr"/>
             <a:fld id="{F7021451-1387-4CA6-816F-3879F97B5CBC}" type="slidenum">
               <a:rPr b="1" lang="en-US"/>
-              <a:t>42</a:t>
+              <a:t>46</a:t>
             </a:fld>
             <a:endParaRPr lang="en-US"/>
           </a:p>
@@ -16858,9 +18371,9 @@
 </p:sld>
 </file>
 
-<file path=ppt/slides/slide43.xml><?xml version="1.0" encoding="utf-8"?>
+<file path=ppt/slides/slide47.xml><?xml version="1.0" encoding="utf-8"?>
 <p:sld xmlns:a="http://schemas.openxmlformats.org/drawingml/2006/main" xmlns:r="http://schemas.openxmlformats.org/officeDocument/2006/relationships" xmlns:p="http://schemas.openxmlformats.org/presentationml/2006/main">
-  <p:cSld name="Slide 43">
+  <p:cSld name="Slide 47">
     <p:spTree>
       <p:nvGrpSpPr>
         <p:cNvPr id="1" name=""/>
@@ -16955,7 +18468,7 @@
       </p:sp>
       <p:graphicFrame>
         <p:nvGraphicFramePr>
-          <p:cNvPr id="44" name="Table 0"/>
+          <p:cNvPr id="48" name="Table 0"/>
           <p:cNvGraphicFramePr>
             <a:graphicFrameLocks noGrp="1"/>
           </p:cNvGraphicFramePr>
@@ -17065,7 +18578,7 @@
                           <a:ea typeface="Calibri" pitchFamily="34" charset="-122"/>
                           <a:cs typeface="Calibri" pitchFamily="34" charset="-120"/>
                         </a:rPr>
-                        <a:t>Weather and Climate; The Weather Station; Weather Elements, Instruments and Isolines.</a:t>
+                        <a:t>DEFINITIONS; Weather Elements, Instruments and Measurements; Isolines of the Weather Elements.</a:t>
                       </a:r>
                       <a:endParaRPr lang="en-US" sz="1600" dirty="0">
                         <a:latin typeface="Calibri" charset="0"/>
@@ -17715,7 +19228,7 @@
             <a:pPr algn="ctr"/>
             <a:fld id="{F7021451-1387-4CA6-816F-3879F97B5CBC}" type="slidenum">
               <a:rPr b="1" lang="en-US"/>
-              <a:t>43</a:t>
+              <a:t>47</a:t>
             </a:fld>
             <a:endParaRPr lang="en-US"/>
           </a:p>
@@ -17729,9 +19242,9 @@
 </p:sld>
 </file>
 
-<file path=ppt/slides/slide44.xml><?xml version="1.0" encoding="utf-8"?>
+<file path=ppt/slides/slide48.xml><?xml version="1.0" encoding="utf-8"?>
 <p:sld xmlns:a="http://schemas.openxmlformats.org/drawingml/2006/main" xmlns:r="http://schemas.openxmlformats.org/officeDocument/2006/relationships" xmlns:p="http://schemas.openxmlformats.org/presentationml/2006/main">
-  <p:cSld name="Slide 44">
+  <p:cSld name="Slide 48">
     <p:spTree>
       <p:nvGrpSpPr>
         <p:cNvPr id="1" name=""/>
@@ -17908,7 +19421,7 @@
                 <a:ea typeface="Calibri" pitchFamily="34" charset="-122"/>
                 <a:cs typeface="Calibri" pitchFamily="34" charset="-120"/>
               </a:rPr>
-              <a:t>Without the projector (Activity 1): ask learners to describe the weather today.</a:t>
+              <a:t>Without the projector (Activity 1): describe the weather of today.</a:t>
             </a:r>
             <a:endParaRPr lang="en-US" sz="2000" dirty="0"/>
           </a:p>
@@ -17929,7 +19442,7 @@
                 <a:ea typeface="Calibri" pitchFamily="34" charset="-122"/>
                 <a:cs typeface="Calibri" pitchFamily="34" charset="-120"/>
               </a:rPr>
-              <a:t>Without the projector (Activity 2): mention the weather station at Garoua airport.</a:t>
+              <a:t>Without the projector (Activity 2): describe the weather station of Garoua airport.</a:t>
             </a:r>
             <a:endParaRPr lang="en-US" sz="2000" dirty="0"/>
           </a:p>
@@ -17950,7 +19463,7 @@
                 <a:ea typeface="Calibri" pitchFamily="34" charset="-122"/>
                 <a:cs typeface="Calibri" pitchFamily="34" charset="-120"/>
               </a:rPr>
-              <a:t>Without the projector (Activity 3): make a paper wind vane.</a:t>
+              <a:t>Without the projector (Activity 3): make a paper windmill.</a:t>
             </a:r>
             <a:endParaRPr lang="en-US" sz="2000" dirty="0"/>
           </a:p>
@@ -17998,7 +19511,7 @@
             <a:pPr algn="ctr"/>
             <a:fld id="{F7021451-1387-4CA6-816F-3879F97B5CBC}" type="slidenum">
               <a:rPr b="1" lang="en-US"/>
-              <a:t>44</a:t>
+              <a:t>48</a:t>
             </a:fld>
             <a:endParaRPr lang="en-US"/>
           </a:p>
@@ -18012,9 +19525,9 @@
 </p:sld>
 </file>
 
-<file path=ppt/slides/slide45.xml><?xml version="1.0" encoding="utf-8"?>
+<file path=ppt/slides/slide49.xml><?xml version="1.0" encoding="utf-8"?>
 <p:sld xmlns:a="http://schemas.openxmlformats.org/drawingml/2006/main" xmlns:r="http://schemas.openxmlformats.org/officeDocument/2006/relationships" xmlns:p="http://schemas.openxmlformats.org/presentationml/2006/main">
-  <p:cSld name="Slide 45">
+  <p:cSld name="Slide 49">
     <p:spTree>
       <p:nvGrpSpPr>
         <p:cNvPr id="1" name=""/>
@@ -18085,7 +19598,7 @@
         <p:spPr>
           <a:xfrm>
             <a:off x="0" y="658368"/>
-            <a:ext cx="3840480" cy="5833872"/>
+            <a:ext cx="2468880" cy="5833872"/>
           </a:xfrm>
           <a:prstGeom prst="rect">
             <a:avLst/>
@@ -18100,8 +19613,8 @@
         </p:nvSpPr>
         <p:spPr>
           <a:xfrm>
-            <a:off x="4069080" y="1005840"/>
-            <a:ext cx="7802575" cy="731520"/>
+            <a:off x="2697480" y="1005840"/>
+            <a:ext cx="9174175" cy="731520"/>
           </a:xfrm>
           <a:prstGeom prst="rect">
             <a:avLst/>
@@ -18141,8 +19654,8 @@
         </p:nvSpPr>
         <p:spPr>
           <a:xfrm>
-            <a:off x="4069080" y="1783080"/>
-            <a:ext cx="7802575" cy="4663440"/>
+            <a:off x="2697480" y="1783080"/>
+            <a:ext cx="9174175" cy="4663440"/>
           </a:xfrm>
           <a:prstGeom prst="rect">
             <a:avLst/>
@@ -18275,6 +19788,27 @@
                 <a:ea typeface="Calibri" pitchFamily="34" charset="-122"/>
                 <a:cs typeface="Calibri" pitchFamily="34" charset="-120"/>
               </a:rPr>
+              <a:t>Photo, board summary (Rainfall): “Sarasota - Rain Gauge (in 23rd Year)” by roger4336, CC BY-SA 2.0, via Flickr (https://www.flickr.com/photos/24736216@N07/8370429863)</a:t>
+            </a:r>
+            <a:endParaRPr lang="en-US" sz="1800" dirty="0"/>
+          </a:p>
+          <a:p>
+            <a:pPr algn="l" marL="342900" indent="-342900">
+              <a:spcAft>
+                <a:spcPts val="800"/>
+              </a:spcAft>
+              <a:buSzPct val="100000"/>
+              <a:buChar char="•"/>
+            </a:pPr>
+            <a:r>
+              <a:rPr lang="en-US" sz="1800" dirty="0">
+                <a:solidFill>
+                  <a:srgbClr val="111111"/>
+                </a:solidFill>
+                <a:latin typeface="Calibri" pitchFamily="34" charset="0"/>
+                <a:ea typeface="Calibri" pitchFamily="34" charset="-122"/>
+                <a:cs typeface="Calibri" pitchFamily="34" charset="-120"/>
+              </a:rPr>
               <a:t>Diagrams and animations: drawn for this lesson (Geography Department).</a:t>
             </a:r>
             <a:endParaRPr lang="en-US" sz="1800" dirty="0"/>
@@ -18323,7 +19857,7 @@
             <a:pPr algn="ctr"/>
             <a:fld id="{F7021451-1387-4CA6-816F-3879F97B5CBC}" type="slidenum">
               <a:rPr b="1" lang="en-US"/>
-              <a:t>45</a:t>
+              <a:t>49</a:t>
             </a:fld>
             <a:endParaRPr lang="en-US"/>
           </a:p>

--- a/lecons/F3/35_FORM4_LESSON31_Weather_and_Climate.pptx
+++ b/lecons/F3/35_FORM4_LESSON31_Weather_and_Climate.pptx
@@ -3454,7 +3454,7 @@
           <a:p>
             <a:r>
               <a:rPr lang="en-US" dirty="0"/>
-              <a:t>Before we start the new lesson, let us correct the homework I gave you at the end of Lesson 30: The Atmosphere. The question was: Watch or listen to a weather forecast on television or radio. Write down two pieces of information it gives (for example temperature, rain or wind). Take out your exercise books.</a:t>
+              <a:t>Before we start the new lesson, let us correct the homework I gave you at the end of Lesson 30: The Atmosphere. The question was: Distinguish weather from climate. Take out your exercise books.</a:t>
             </a:r>
             <a:endParaRPr lang="en-US" dirty="0"/>
           </a:p>
@@ -3806,7 +3806,7 @@
           <a:p>
             <a:r>
               <a:rPr lang="en-US" dirty="0"/>
-              <a:t>For your homework: Put one bottle of water in the sun and another in the shade for one hour. Touch both and write down which is hotter and why. We shall correct it at the beginning of our next lesson.</a:t>
+              <a:t>For your homework: Name the instrument that records the maximum and minimum temperatures. We shall correct it at the beginning of our next lesson.</a:t>
             </a:r>
             <a:endParaRPr lang="en-US" dirty="0"/>
           </a:p>
@@ -4422,7 +4422,7 @@
           <a:p>
             <a:r>
               <a:rPr lang="en-US" dirty="0"/>
-              <a:t>Here is a good answer. Examples: the forecast gave the temperature (maximum 36 °C in Garoua), the chance of rain (storms in the evening) and the wind (dust-laden Harmattan). Compare it with your own answer and correct your work in red.</a:t>
+              <a:t>Here is a good answer. Weather is the state of the atmosphere at a given time; climate is the average weather over about 30 years. Compare it with your own answer and correct your work in red.</a:t>
             </a:r>
             <a:endParaRPr lang="en-US" dirty="0"/>
           </a:p>
@@ -14868,7 +14868,7 @@
         <p:spPr>
           <a:xfrm>
             <a:off x="0" y="658368"/>
-            <a:ext cx="3840480" cy="5833872"/>
+            <a:ext cx="5120640" cy="5833872"/>
           </a:xfrm>
           <a:prstGeom prst="rect">
             <a:avLst/>
@@ -14883,8 +14883,8 @@
         </p:nvSpPr>
         <p:spPr>
           <a:xfrm>
-            <a:off x="4069080" y="1005840"/>
-            <a:ext cx="7802575" cy="731520"/>
+            <a:off x="5349240" y="1005840"/>
+            <a:ext cx="6522415" cy="731520"/>
           </a:xfrm>
           <a:prstGeom prst="rect">
             <a:avLst/>
@@ -14924,8 +14924,8 @@
         </p:nvSpPr>
         <p:spPr>
           <a:xfrm>
-            <a:off x="4069080" y="1783080"/>
-            <a:ext cx="7802575" cy="4663440"/>
+            <a:off x="5349240" y="1783080"/>
+            <a:ext cx="6522415" cy="4663440"/>
           </a:xfrm>
           <a:prstGeom prst="rect">
             <a:avLst/>
@@ -14972,7 +14972,7 @@
                 <a:ea typeface="Times New Roman" pitchFamily="34" charset="-122"/>
                 <a:cs typeface="Times New Roman" pitchFamily="34" charset="-120"/>
               </a:rPr>
-              <a:t>Watch or listen to a weather forecast on television or radio. Write down two pieces of information it gives (for example temperature, rain or wind).</a:t>
+              <a:t>Distinguish weather from climate.</a:t>
             </a:r>
             <a:endParaRPr lang="en-US" sz="4000" dirty="0"/>
           </a:p>
@@ -15914,7 +15914,7 @@
                 <a:ea typeface="Times New Roman" pitchFamily="34" charset="-122"/>
                 <a:cs typeface="Times New Roman" pitchFamily="34" charset="-120"/>
               </a:rPr>
-              <a:t>Put one bottle of water in the sun and another in the shade for one hour. Touch both and write down which is hotter and why.</a:t>
+              <a:t>Name the instrument that records the maximum and minimum temperatures.</a:t>
             </a:r>
             <a:endParaRPr lang="en-US" sz="4000" dirty="0"/>
           </a:p>
@@ -18854,7 +18854,7 @@
                           <a:ea typeface="Calibri" pitchFamily="34" charset="-122"/>
                           <a:cs typeface="Calibri" pitchFamily="34" charset="-120"/>
                         </a:rPr>
-                        <a:t>Put one bottle of water in the sun and another in the shade for one hour. Touch both and write down which is hotter and why.</a:t>
+                        <a:t>Name the instrument that records the maximum and minimum temperatures.</a:t>
                       </a:r>
                       <a:endParaRPr lang="en-US" sz="1600" dirty="0">
                         <a:latin typeface="Calibri" charset="0"/>
@@ -20028,7 +20028,7 @@
                 <a:ea typeface="Times New Roman" pitchFamily="34" charset="-122"/>
                 <a:cs typeface="Times New Roman" pitchFamily="34" charset="-120"/>
               </a:rPr>
-              <a:t>Examples: the forecast gave the temperature (maximum 36 °C in Garoua), the chance of rain (storms in the evening) and the wind (dust-laden Harmattan).</a:t>
+              <a:t>Weather is the state of the atmosphere at a given time; climate is the average weather over about 30 years.</a:t>
             </a:r>
             <a:endParaRPr lang="en-US" sz="4000" dirty="0"/>
           </a:p>
